--- a/2026_SMDM/04_simple_DES.pptx
+++ b/2026_SMDM/04_simple_DES.pptx
@@ -5,14 +5,13 @@
     <p:sldMasterId id="2147483648" r:id="rId4"/>
   </p:sldMasterIdLst>
   <p:notesMasterIdLst>
-    <p:notesMasterId r:id="rId10"/>
+    <p:notesMasterId r:id="rId9"/>
   </p:notesMasterIdLst>
   <p:sldIdLst>
     <p:sldId id="1100" r:id="rId5"/>
     <p:sldId id="1046" r:id="rId6"/>
-    <p:sldId id="1102" r:id="rId7"/>
-    <p:sldId id="1079" r:id="rId8"/>
-    <p:sldId id="1101" r:id="rId9"/>
+    <p:sldId id="1079" r:id="rId7"/>
+    <p:sldId id="1101" r:id="rId8"/>
   </p:sldIdLst>
   <p:sldSz cx="12192000" cy="6858000"/>
   <p:notesSz cx="6858000" cy="9144000"/>
@@ -212,7 +211,7 @@
           <a:p>
             <a:fld id="{E033252C-ECEF-0044-BF19-FBFB46CE84A2}" type="datetimeFigureOut">
               <a:rPr lang="en-US" smtClean="0"/>
-              <a:t>6/14/25</a:t>
+              <a:t>6/27/26</a:t>
             </a:fld>
             <a:endParaRPr lang="en-US"/>
           </a:p>
@@ -626,7 +625,7 @@
           <a:p>
             <a:fld id="{6A8FB48A-BFC4-2846-8228-6201ABA4D0C5}" type="datetimeFigureOut">
               <a:rPr lang="en-US" smtClean="0"/>
-              <a:t>6/14/25</a:t>
+              <a:t>6/27/26</a:t>
             </a:fld>
             <a:endParaRPr lang="en-US"/>
           </a:p>
@@ -824,7 +823,7 @@
           <a:p>
             <a:fld id="{6A8FB48A-BFC4-2846-8228-6201ABA4D0C5}" type="datetimeFigureOut">
               <a:rPr lang="en-US" smtClean="0"/>
-              <a:t>6/14/25</a:t>
+              <a:t>6/27/26</a:t>
             </a:fld>
             <a:endParaRPr lang="en-US"/>
           </a:p>
@@ -1032,7 +1031,7 @@
           <a:p>
             <a:fld id="{6A8FB48A-BFC4-2846-8228-6201ABA4D0C5}" type="datetimeFigureOut">
               <a:rPr lang="en-US" smtClean="0"/>
-              <a:t>6/14/25</a:t>
+              <a:t>6/27/26</a:t>
             </a:fld>
             <a:endParaRPr lang="en-US"/>
           </a:p>
@@ -1230,7 +1229,7 @@
           <a:p>
             <a:fld id="{6A8FB48A-BFC4-2846-8228-6201ABA4D0C5}" type="datetimeFigureOut">
               <a:rPr lang="en-US" smtClean="0"/>
-              <a:t>6/14/25</a:t>
+              <a:t>6/27/26</a:t>
             </a:fld>
             <a:endParaRPr lang="en-US"/>
           </a:p>
@@ -1505,7 +1504,7 @@
           <a:p>
             <a:fld id="{6A8FB48A-BFC4-2846-8228-6201ABA4D0C5}" type="datetimeFigureOut">
               <a:rPr lang="en-US" smtClean="0"/>
-              <a:t>6/14/25</a:t>
+              <a:t>6/27/26</a:t>
             </a:fld>
             <a:endParaRPr lang="en-US"/>
           </a:p>
@@ -1770,7 +1769,7 @@
           <a:p>
             <a:fld id="{6A8FB48A-BFC4-2846-8228-6201ABA4D0C5}" type="datetimeFigureOut">
               <a:rPr lang="en-US" smtClean="0"/>
-              <a:t>6/14/25</a:t>
+              <a:t>6/27/26</a:t>
             </a:fld>
             <a:endParaRPr lang="en-US"/>
           </a:p>
@@ -2182,7 +2181,7 @@
           <a:p>
             <a:fld id="{6A8FB48A-BFC4-2846-8228-6201ABA4D0C5}" type="datetimeFigureOut">
               <a:rPr lang="en-US" smtClean="0"/>
-              <a:t>6/14/25</a:t>
+              <a:t>6/27/26</a:t>
             </a:fld>
             <a:endParaRPr lang="en-US"/>
           </a:p>
@@ -2323,7 +2322,7 @@
           <a:p>
             <a:fld id="{6A8FB48A-BFC4-2846-8228-6201ABA4D0C5}" type="datetimeFigureOut">
               <a:rPr lang="en-US" smtClean="0"/>
-              <a:t>6/14/25</a:t>
+              <a:t>6/27/26</a:t>
             </a:fld>
             <a:endParaRPr lang="en-US"/>
           </a:p>
@@ -2436,7 +2435,7 @@
           <a:p>
             <a:fld id="{6A8FB48A-BFC4-2846-8228-6201ABA4D0C5}" type="datetimeFigureOut">
               <a:rPr lang="en-US" smtClean="0"/>
-              <a:t>6/14/25</a:t>
+              <a:t>6/27/26</a:t>
             </a:fld>
             <a:endParaRPr lang="en-US"/>
           </a:p>
@@ -2747,7 +2746,7 @@
           <a:p>
             <a:fld id="{6A8FB48A-BFC4-2846-8228-6201ABA4D0C5}" type="datetimeFigureOut">
               <a:rPr lang="en-US" smtClean="0"/>
-              <a:t>6/14/25</a:t>
+              <a:t>6/27/26</a:t>
             </a:fld>
             <a:endParaRPr lang="en-US"/>
           </a:p>
@@ -3035,7 +3034,7 @@
           <a:p>
             <a:fld id="{6A8FB48A-BFC4-2846-8228-6201ABA4D0C5}" type="datetimeFigureOut">
               <a:rPr lang="en-US" smtClean="0"/>
-              <a:t>6/14/25</a:t>
+              <a:t>6/27/26</a:t>
             </a:fld>
             <a:endParaRPr lang="en-US"/>
           </a:p>
@@ -3276,7 +3275,7 @@
           <a:p>
             <a:fld id="{6A8FB48A-BFC4-2846-8228-6201ABA4D0C5}" type="datetimeFigureOut">
               <a:rPr lang="en-US" smtClean="0"/>
-              <a:t>6/14/25</a:t>
+              <a:t>6/27/26</a:t>
             </a:fld>
             <a:endParaRPr lang="en-US"/>
           </a:p>
@@ -3699,668 +3698,6 @@
           <a:chExt cx="0" cy="0"/>
         </a:xfrm>
       </p:grpSpPr>
-      <p:graphicFrame>
-        <p:nvGraphicFramePr>
-          <p:cNvPr id="4" name="Content Placeholder 3">
-            <a:extLst>
-              <a:ext uri="{FF2B5EF4-FFF2-40B4-BE49-F238E27FC236}">
-                <a16:creationId xmlns:a16="http://schemas.microsoft.com/office/drawing/2014/main" id="{655314A2-2BED-36EA-B4B2-DECEE9EBBB31}"/>
-              </a:ext>
-            </a:extLst>
-          </p:cNvPr>
-          <p:cNvGraphicFramePr>
-            <a:graphicFrameLocks noGrp="1"/>
-          </p:cNvGraphicFramePr>
-          <p:nvPr>
-            <p:ph idx="1"/>
-          </p:nvPr>
-        </p:nvGraphicFramePr>
-        <p:xfrm>
-          <a:off x="1208690" y="942340"/>
-          <a:ext cx="10720551" cy="4973320"/>
-        </p:xfrm>
-        <a:graphic>
-          <a:graphicData uri="http://schemas.openxmlformats.org/drawingml/2006/table">
-            <a:tbl>
-              <a:tblPr firstRow="1" bandRow="1">
-                <a:tableStyleId>{21E4AEA4-8DFA-4A89-87EB-49C32662AFE0}</a:tableStyleId>
-              </a:tblPr>
-              <a:tblGrid>
-                <a:gridCol w="1717110">
-                  <a:extLst>
-                    <a:ext uri="{9D8B030D-6E8A-4147-A177-3AD203B41FA5}">
-                      <a16:colId xmlns:a16="http://schemas.microsoft.com/office/drawing/2014/main" val="4182014441"/>
-                    </a:ext>
-                  </a:extLst>
-                </a:gridCol>
-                <a:gridCol w="5976462">
-                  <a:extLst>
-                    <a:ext uri="{9D8B030D-6E8A-4147-A177-3AD203B41FA5}">
-                      <a16:colId xmlns:a16="http://schemas.microsoft.com/office/drawing/2014/main" val="906180283"/>
-                    </a:ext>
-                  </a:extLst>
-                </a:gridCol>
-                <a:gridCol w="3026979">
-                  <a:extLst>
-                    <a:ext uri="{9D8B030D-6E8A-4147-A177-3AD203B41FA5}">
-                      <a16:colId xmlns:a16="http://schemas.microsoft.com/office/drawing/2014/main" val="2769721792"/>
-                    </a:ext>
-                  </a:extLst>
-                </a:gridCol>
-              </a:tblGrid>
-              <a:tr h="370840">
-                <a:tc>
-                  <a:txBody>
-                    <a:bodyPr/>
-                    <a:lstStyle/>
-                    <a:p>
-                      <a:r>
-                        <a:rPr lang="en-US" dirty="0"/>
-                        <a:t>Time</a:t>
-                      </a:r>
-                    </a:p>
-                  </a:txBody>
-                  <a:tcPr/>
-                </a:tc>
-                <a:tc>
-                  <a:txBody>
-                    <a:bodyPr/>
-                    <a:lstStyle/>
-                    <a:p>
-                      <a:r>
-                        <a:rPr lang="en-US" dirty="0"/>
-                        <a:t>Description</a:t>
-                      </a:r>
-                    </a:p>
-                  </a:txBody>
-                  <a:tcPr/>
-                </a:tc>
-                <a:tc>
-                  <a:txBody>
-                    <a:bodyPr/>
-                    <a:lstStyle/>
-                    <a:p>
-                      <a:r>
-                        <a:rPr lang="en-US" dirty="0"/>
-                        <a:t>Discussant</a:t>
-                      </a:r>
-                    </a:p>
-                  </a:txBody>
-                  <a:tcPr/>
-                </a:tc>
-                <a:extLst>
-                  <a:ext uri="{0D108BD9-81ED-4DB2-BD59-A6C34878D82A}">
-                    <a16:rowId xmlns:a16="http://schemas.microsoft.com/office/drawing/2014/main" val="1700444250"/>
-                  </a:ext>
-                </a:extLst>
-              </a:tr>
-              <a:tr h="370840">
-                <a:tc>
-                  <a:txBody>
-                    <a:bodyPr/>
-                    <a:lstStyle/>
-                    <a:p>
-                      <a:r>
-                        <a:rPr lang="en-US" dirty="0"/>
-                        <a:t>[15 min]</a:t>
-                      </a:r>
-                    </a:p>
-                  </a:txBody>
-                  <a:tcPr/>
-                </a:tc>
-                <a:tc>
-                  <a:txBody>
-                    <a:bodyPr/>
-                    <a:lstStyle/>
-                    <a:p>
-                      <a:r>
-                        <a:rPr lang="en-US" sz="1800" kern="1200" dirty="0">
-                          <a:solidFill>
-                            <a:schemeClr val="dk1"/>
-                          </a:solidFill>
-                          <a:effectLst/>
-                          <a:latin typeface="+mn-lt"/>
-                          <a:ea typeface="+mn-ea"/>
-                          <a:cs typeface="+mn-cs"/>
-                        </a:rPr>
-                        <a:t>(0) Introductions and administrivia </a:t>
-                      </a:r>
-                      <a:endParaRPr lang="en-US" dirty="0"/>
-                    </a:p>
-                  </a:txBody>
-                  <a:tcPr/>
-                </a:tc>
-                <a:tc>
-                  <a:txBody>
-                    <a:bodyPr/>
-                    <a:lstStyle/>
-                    <a:p>
-                      <a:r>
-                        <a:rPr lang="en-US" dirty="0" err="1"/>
-                        <a:t>Trikalinos</a:t>
-                      </a:r>
-                      <a:endParaRPr lang="en-US" dirty="0"/>
-                    </a:p>
-                  </a:txBody>
-                  <a:tcPr/>
-                </a:tc>
-                <a:extLst>
-                  <a:ext uri="{0D108BD9-81ED-4DB2-BD59-A6C34878D82A}">
-                    <a16:rowId xmlns:a16="http://schemas.microsoft.com/office/drawing/2014/main" val="2490995723"/>
-                  </a:ext>
-                </a:extLst>
-              </a:tr>
-              <a:tr h="370840">
-                <a:tc>
-                  <a:txBody>
-                    <a:bodyPr/>
-                    <a:lstStyle/>
-                    <a:p>
-                      <a:r>
-                        <a:rPr lang="en-US" dirty="0"/>
-                        <a:t>[25 min]</a:t>
-                      </a:r>
-                    </a:p>
-                  </a:txBody>
-                  <a:tcPr/>
-                </a:tc>
-                <a:tc>
-                  <a:txBody>
-                    <a:bodyPr/>
-                    <a:lstStyle/>
-                    <a:p>
-                      <a:r>
-                        <a:rPr lang="en-US" sz="1800" kern="1200" dirty="0">
-                          <a:solidFill>
-                            <a:schemeClr val="dk1"/>
-                          </a:solidFill>
-                          <a:effectLst/>
-                          <a:latin typeface="+mn-lt"/>
-                          <a:ea typeface="+mn-ea"/>
-                          <a:cs typeface="+mn-cs"/>
-                        </a:rPr>
-                        <a:t>(1) DES as a composition of point processes</a:t>
-                      </a:r>
-                    </a:p>
-                  </a:txBody>
-                  <a:tcPr/>
-                </a:tc>
-                <a:tc>
-                  <a:txBody>
-                    <a:bodyPr/>
-                    <a:lstStyle/>
-                    <a:p>
-                      <a:r>
-                        <a:rPr lang="en-US" dirty="0" err="1"/>
-                        <a:t>Alarid</a:t>
-                      </a:r>
-                      <a:r>
-                        <a:rPr lang="en-US" dirty="0"/>
-                        <a:t>-Escudero</a:t>
-                      </a:r>
-                    </a:p>
-                  </a:txBody>
-                  <a:tcPr/>
-                </a:tc>
-                <a:extLst>
-                  <a:ext uri="{0D108BD9-81ED-4DB2-BD59-A6C34878D82A}">
-                    <a16:rowId xmlns:a16="http://schemas.microsoft.com/office/drawing/2014/main" val="2065491183"/>
-                  </a:ext>
-                </a:extLst>
-              </a:tr>
-              <a:tr h="370840">
-                <a:tc>
-                  <a:txBody>
-                    <a:bodyPr/>
-                    <a:lstStyle/>
-                    <a:p>
-                      <a:r>
-                        <a:rPr lang="en-US" dirty="0"/>
-                        <a:t>[30 min]</a:t>
-                      </a:r>
-                    </a:p>
-                  </a:txBody>
-                  <a:tcPr/>
-                </a:tc>
-                <a:tc>
-                  <a:txBody>
-                    <a:bodyPr/>
-                    <a:lstStyle/>
-                    <a:p>
-                      <a:pPr marL="0" marR="0" lvl="0" indent="0" algn="l" defTabSz="914400" rtl="0" eaLnBrk="1" fontAlgn="auto" latinLnBrk="0" hangingPunct="1">
-                        <a:lnSpc>
-                          <a:spcPct val="100000"/>
-                        </a:lnSpc>
-                        <a:spcBef>
-                          <a:spcPts val="0"/>
-                        </a:spcBef>
-                        <a:spcAft>
-                          <a:spcPts val="0"/>
-                        </a:spcAft>
-                        <a:buClrTx/>
-                        <a:buSzTx/>
-                        <a:buFontTx/>
-                        <a:buNone/>
-                        <a:tabLst/>
-                        <a:defRPr/>
-                      </a:pPr>
-                      <a:r>
-                        <a:rPr lang="en-US" sz="1800" kern="1200" dirty="0">
-                          <a:solidFill>
-                            <a:schemeClr val="dk1"/>
-                          </a:solidFill>
-                          <a:effectLst/>
-                          <a:latin typeface="+mn-lt"/>
-                          <a:ea typeface="+mn-ea"/>
-                          <a:cs typeface="+mn-cs"/>
-                        </a:rPr>
-                        <a:t>(2) NHPPPs – key properties</a:t>
-                      </a:r>
-                    </a:p>
-                  </a:txBody>
-                  <a:tcPr/>
-                </a:tc>
-                <a:tc>
-                  <a:txBody>
-                    <a:bodyPr/>
-                    <a:lstStyle/>
-                    <a:p>
-                      <a:r>
-                        <a:rPr lang="en-US" dirty="0" err="1"/>
-                        <a:t>Trikalinos</a:t>
-                      </a:r>
-                      <a:endParaRPr lang="en-US" dirty="0"/>
-                    </a:p>
-                  </a:txBody>
-                  <a:tcPr/>
-                </a:tc>
-                <a:extLst>
-                  <a:ext uri="{0D108BD9-81ED-4DB2-BD59-A6C34878D82A}">
-                    <a16:rowId xmlns:a16="http://schemas.microsoft.com/office/drawing/2014/main" val="2757944147"/>
-                  </a:ext>
-                </a:extLst>
-              </a:tr>
-              <a:tr h="370840">
-                <a:tc>
-                  <a:txBody>
-                    <a:bodyPr/>
-                    <a:lstStyle/>
-                    <a:p>
-                      <a:r>
-                        <a:rPr lang="en-US" dirty="0"/>
-                        <a:t>[30 min]</a:t>
-                      </a:r>
-                    </a:p>
-                  </a:txBody>
-                  <a:tcPr/>
-                </a:tc>
-                <a:tc>
-                  <a:txBody>
-                    <a:bodyPr/>
-                    <a:lstStyle/>
-                    <a:p>
-                      <a:r>
-                        <a:rPr lang="en-US" sz="1800" kern="1200" dirty="0">
-                          <a:solidFill>
-                            <a:schemeClr val="dk1"/>
-                          </a:solidFill>
-                          <a:effectLst/>
-                          <a:latin typeface="+mn-lt"/>
-                          <a:ea typeface="+mn-ea"/>
-                          <a:cs typeface="+mn-cs"/>
-                        </a:rPr>
-                        <a:t>(3) Sampling from NHPPPs</a:t>
-                      </a:r>
-                      <a:endParaRPr lang="en-US" dirty="0"/>
-                    </a:p>
-                  </a:txBody>
-                  <a:tcPr/>
-                </a:tc>
-                <a:tc>
-                  <a:txBody>
-                    <a:bodyPr/>
-                    <a:lstStyle/>
-                    <a:p>
-                      <a:r>
-                        <a:rPr lang="en-US" dirty="0" err="1"/>
-                        <a:t>Sereda</a:t>
-                      </a:r>
-                      <a:endParaRPr lang="en-US" dirty="0"/>
-                    </a:p>
-                  </a:txBody>
-                  <a:tcPr/>
-                </a:tc>
-                <a:extLst>
-                  <a:ext uri="{0D108BD9-81ED-4DB2-BD59-A6C34878D82A}">
-                    <a16:rowId xmlns:a16="http://schemas.microsoft.com/office/drawing/2014/main" val="1442363784"/>
-                  </a:ext>
-                </a:extLst>
-              </a:tr>
-              <a:tr h="370840">
-                <a:tc>
-                  <a:txBody>
-                    <a:bodyPr/>
-                    <a:lstStyle/>
-                    <a:p>
-                      <a:r>
-                        <a:rPr lang="en-US" dirty="0"/>
-                        <a:t>[15 min]</a:t>
-                      </a:r>
-                    </a:p>
-                  </a:txBody>
-                  <a:tcPr/>
-                </a:tc>
-                <a:tc>
-                  <a:txBody>
-                    <a:bodyPr/>
-                    <a:lstStyle/>
-                    <a:p>
-                      <a:pPr marL="0" marR="0" lvl="0" indent="0" algn="l" defTabSz="914400" rtl="0" eaLnBrk="1" fontAlgn="auto" latinLnBrk="0" hangingPunct="1">
-                        <a:lnSpc>
-                          <a:spcPct val="100000"/>
-                        </a:lnSpc>
-                        <a:spcBef>
-                          <a:spcPts val="0"/>
-                        </a:spcBef>
-                        <a:spcAft>
-                          <a:spcPts val="0"/>
-                        </a:spcAft>
-                        <a:buClrTx/>
-                        <a:buSzTx/>
-                        <a:buFontTx/>
-                        <a:buNone/>
-                        <a:tabLst/>
-                        <a:defRPr/>
-                      </a:pPr>
-                      <a:r>
-                        <a:rPr lang="en-US" b="1" dirty="0"/>
-                        <a:t>Break</a:t>
-                      </a:r>
-                    </a:p>
-                  </a:txBody>
-                  <a:tcPr/>
-                </a:tc>
-                <a:tc>
-                  <a:txBody>
-                    <a:bodyPr/>
-                    <a:lstStyle/>
-                    <a:p>
-                      <a:endParaRPr lang="en-US" dirty="0"/>
-                    </a:p>
-                  </a:txBody>
-                  <a:tcPr/>
-                </a:tc>
-                <a:extLst>
-                  <a:ext uri="{0D108BD9-81ED-4DB2-BD59-A6C34878D82A}">
-                    <a16:rowId xmlns:a16="http://schemas.microsoft.com/office/drawing/2014/main" val="1269228105"/>
-                  </a:ext>
-                </a:extLst>
-              </a:tr>
-              <a:tr h="370840">
-                <a:tc>
-                  <a:txBody>
-                    <a:bodyPr/>
-                    <a:lstStyle/>
-                    <a:p>
-                      <a:r>
-                        <a:rPr lang="en-US" dirty="0"/>
-                        <a:t>[80 min]</a:t>
-                      </a:r>
-                    </a:p>
-                  </a:txBody>
-                  <a:tcPr/>
-                </a:tc>
-                <a:tc>
-                  <a:txBody>
-                    <a:bodyPr/>
-                    <a:lstStyle/>
-                    <a:p>
-                      <a:r>
-                        <a:rPr lang="en-US" sz="1800" kern="1200" dirty="0">
-                          <a:solidFill>
-                            <a:schemeClr val="dk1"/>
-                          </a:solidFill>
-                          <a:effectLst/>
-                          <a:latin typeface="+mn-lt"/>
-                          <a:ea typeface="+mn-ea"/>
-                          <a:cs typeface="+mn-cs"/>
-                        </a:rPr>
-                        <a:t>(4) Guided exercise: </a:t>
-                      </a:r>
-                    </a:p>
-                    <a:p>
-                      <a:pPr marL="285750" indent="-285750">
-                        <a:buFontTx/>
-                        <a:buChar char="-"/>
-                      </a:pPr>
-                      <a:r>
-                        <a:rPr lang="en-US" sz="1800" kern="1200" dirty="0">
-                          <a:solidFill>
-                            <a:schemeClr val="dk1"/>
-                          </a:solidFill>
-                          <a:effectLst/>
-                          <a:latin typeface="+mn-lt"/>
-                          <a:ea typeface="+mn-ea"/>
-                          <a:cs typeface="+mn-cs"/>
-                        </a:rPr>
-                        <a:t>Implement a simple cancer natural history DES for one person</a:t>
-                      </a:r>
-                    </a:p>
-                    <a:p>
-                      <a:pPr marL="285750" indent="-285750">
-                        <a:buFontTx/>
-                        <a:buChar char="-"/>
-                      </a:pPr>
-                      <a:r>
-                        <a:rPr lang="en-US" sz="1800" kern="1200" dirty="0">
-                          <a:solidFill>
-                            <a:schemeClr val="dk1"/>
-                          </a:solidFill>
-                          <a:effectLst/>
-                          <a:latin typeface="+mn-lt"/>
-                          <a:ea typeface="+mn-ea"/>
-                          <a:cs typeface="+mn-cs"/>
-                        </a:rPr>
-                        <a:t>The many-person case</a:t>
-                      </a:r>
-                    </a:p>
-                    <a:p>
-                      <a:pPr marL="285750" indent="-285750">
-                        <a:buFontTx/>
-                        <a:buChar char="-"/>
-                      </a:pPr>
-                      <a:r>
-                        <a:rPr lang="en-US" sz="1800" kern="1200" dirty="0">
-                          <a:solidFill>
-                            <a:schemeClr val="dk1"/>
-                          </a:solidFill>
-                          <a:effectLst/>
-                          <a:latin typeface="+mn-lt"/>
-                          <a:ea typeface="+mn-ea"/>
-                          <a:cs typeface="+mn-cs"/>
-                        </a:rPr>
-                        <a:t>Packaging </a:t>
-                      </a:r>
-                    </a:p>
-                  </a:txBody>
-                  <a:tcPr/>
-                </a:tc>
-                <a:tc>
-                  <a:txBody>
-                    <a:bodyPr/>
-                    <a:lstStyle/>
-                    <a:p>
-                      <a:r>
-                        <a:rPr lang="en-US" dirty="0"/>
-                        <a:t>[All]</a:t>
-                      </a:r>
-                    </a:p>
-                    <a:p>
-                      <a:r>
-                        <a:rPr lang="en-US" dirty="0" err="1"/>
-                        <a:t>Chrysanthopoulou</a:t>
-                      </a:r>
-                      <a:endParaRPr lang="en-US" dirty="0"/>
-                    </a:p>
-                    <a:p>
-                      <a:endParaRPr lang="en-US" dirty="0"/>
-                    </a:p>
-                    <a:p>
-                      <a:r>
-                        <a:rPr lang="en-US" dirty="0" err="1"/>
-                        <a:t>Sereda</a:t>
-                      </a:r>
-                      <a:r>
-                        <a:rPr lang="en-US" dirty="0"/>
-                        <a:t>/</a:t>
-                      </a:r>
-                      <a:r>
-                        <a:rPr lang="en-US" dirty="0" err="1"/>
-                        <a:t>Alarid</a:t>
-                      </a:r>
-                      <a:r>
-                        <a:rPr lang="en-US" dirty="0"/>
-                        <a:t>-Escudero</a:t>
-                      </a:r>
-                    </a:p>
-                    <a:p>
-                      <a:r>
-                        <a:rPr lang="en-US" dirty="0" err="1"/>
-                        <a:t>Trikalinos</a:t>
-                      </a:r>
-                      <a:endParaRPr lang="en-US" dirty="0"/>
-                    </a:p>
-                  </a:txBody>
-                  <a:tcPr/>
-                </a:tc>
-                <a:extLst>
-                  <a:ext uri="{0D108BD9-81ED-4DB2-BD59-A6C34878D82A}">
-                    <a16:rowId xmlns:a16="http://schemas.microsoft.com/office/drawing/2014/main" val="1448491104"/>
-                  </a:ext>
-                </a:extLst>
-              </a:tr>
-              <a:tr h="370840">
-                <a:tc>
-                  <a:txBody>
-                    <a:bodyPr/>
-                    <a:lstStyle/>
-                    <a:p>
-                      <a:r>
-                        <a:rPr lang="en-US" dirty="0"/>
-                        <a:t>[10 min]</a:t>
-                      </a:r>
-                    </a:p>
-                  </a:txBody>
-                  <a:tcPr/>
-                </a:tc>
-                <a:tc>
-                  <a:txBody>
-                    <a:bodyPr/>
-                    <a:lstStyle/>
-                    <a:p>
-                      <a:pPr marL="0" marR="0" lvl="0" indent="0" algn="l" defTabSz="914400" rtl="0" eaLnBrk="1" fontAlgn="auto" latinLnBrk="0" hangingPunct="1">
-                        <a:lnSpc>
-                          <a:spcPct val="100000"/>
-                        </a:lnSpc>
-                        <a:spcBef>
-                          <a:spcPts val="0"/>
-                        </a:spcBef>
-                        <a:spcAft>
-                          <a:spcPts val="0"/>
-                        </a:spcAft>
-                        <a:buClrTx/>
-                        <a:buSzTx/>
-                        <a:buFontTx/>
-                        <a:buNone/>
-                        <a:tabLst/>
-                        <a:defRPr/>
-                      </a:pPr>
-                      <a:r>
-                        <a:rPr lang="en-US" sz="1800" kern="1200" dirty="0">
-                          <a:solidFill>
-                            <a:schemeClr val="dk1"/>
-                          </a:solidFill>
-                          <a:effectLst/>
-                          <a:latin typeface="+mn-lt"/>
-                          <a:ea typeface="+mn-ea"/>
-                          <a:cs typeface="+mn-cs"/>
-                        </a:rPr>
-                        <a:t>(5) Advanced Topic Teaser on self-excitatory processes: point processes that are not NHPPPs and when you may need them</a:t>
-                      </a:r>
-                    </a:p>
-                  </a:txBody>
-                  <a:tcPr/>
-                </a:tc>
-                <a:tc>
-                  <a:txBody>
-                    <a:bodyPr/>
-                    <a:lstStyle/>
-                    <a:p>
-                      <a:r>
-                        <a:rPr lang="en-US" dirty="0" err="1"/>
-                        <a:t>Trikalinos</a:t>
-                      </a:r>
-                      <a:endParaRPr lang="en-US" dirty="0"/>
-                    </a:p>
-                  </a:txBody>
-                  <a:tcPr/>
-                </a:tc>
-                <a:extLst>
-                  <a:ext uri="{0D108BD9-81ED-4DB2-BD59-A6C34878D82A}">
-                    <a16:rowId xmlns:a16="http://schemas.microsoft.com/office/drawing/2014/main" val="3766472740"/>
-                  </a:ext>
-                </a:extLst>
-              </a:tr>
-              <a:tr h="370840">
-                <a:tc>
-                  <a:txBody>
-                    <a:bodyPr/>
-                    <a:lstStyle/>
-                    <a:p>
-                      <a:r>
-                        <a:rPr lang="en-US" dirty="0"/>
-                        <a:t>[15 min]</a:t>
-                      </a:r>
-                    </a:p>
-                  </a:txBody>
-                  <a:tcPr/>
-                </a:tc>
-                <a:tc>
-                  <a:txBody>
-                    <a:bodyPr/>
-                    <a:lstStyle/>
-                    <a:p>
-                      <a:r>
-                        <a:rPr lang="en-US" dirty="0"/>
-                        <a:t>General Q &amp; A</a:t>
-                      </a:r>
-                    </a:p>
-                  </a:txBody>
-                  <a:tcPr/>
-                </a:tc>
-                <a:tc>
-                  <a:txBody>
-                    <a:bodyPr/>
-                    <a:lstStyle/>
-                    <a:p>
-                      <a:r>
-                        <a:rPr lang="en-US" dirty="0"/>
-                        <a:t>All</a:t>
-                      </a:r>
-                    </a:p>
-                  </a:txBody>
-                  <a:tcPr/>
-                </a:tc>
-                <a:extLst>
-                  <a:ext uri="{0D108BD9-81ED-4DB2-BD59-A6C34878D82A}">
-                    <a16:rowId xmlns:a16="http://schemas.microsoft.com/office/drawing/2014/main" val="3034331301"/>
-                  </a:ext>
-                </a:extLst>
-              </a:tr>
-            </a:tbl>
-          </a:graphicData>
-        </a:graphic>
-      </p:graphicFrame>
       <p:sp>
         <p:nvSpPr>
           <p:cNvPr id="5" name="Right Arrow 4">
@@ -4414,12 +3751,1439 @@
           </a:p>
         </p:txBody>
       </p:sp>
+      <mc:AlternateContent xmlns:mc="http://schemas.openxmlformats.org/markup-compatibility/2006" xmlns:a14="http://schemas.microsoft.com/office/drawing/2010/main">
+        <mc:Choice Requires="a14">
+          <p:graphicFrame>
+            <p:nvGraphicFramePr>
+              <p:cNvPr id="7" name="Content Placeholder 3">
+                <a:extLst>
+                  <a:ext uri="{FF2B5EF4-FFF2-40B4-BE49-F238E27FC236}">
+                    <a16:creationId xmlns:a16="http://schemas.microsoft.com/office/drawing/2014/main" id="{1A8641C2-97EF-114F-E719-C84F3CF99A82}"/>
+                  </a:ext>
+                </a:extLst>
+              </p:cNvPr>
+              <p:cNvGraphicFramePr>
+                <a:graphicFrameLocks noGrp="1"/>
+              </p:cNvGraphicFramePr>
+              <p:nvPr>
+                <p:ph idx="1"/>
+                <p:extLst>
+                  <p:ext uri="{D42A27DB-BD31-4B8C-83A1-F6EECF244321}">
+                    <p14:modId xmlns:p14="http://schemas.microsoft.com/office/powerpoint/2010/main" val="260976388"/>
+                  </p:ext>
+                </p:extLst>
+              </p:nvPr>
+            </p:nvGraphicFramePr>
+            <p:xfrm>
+              <a:off x="1208690" y="942340"/>
+              <a:ext cx="10720551" cy="4699000"/>
+            </p:xfrm>
+            <a:graphic>
+              <a:graphicData uri="http://schemas.openxmlformats.org/drawingml/2006/table">
+                <a:tbl>
+                  <a:tblPr firstRow="1" bandRow="1">
+                    <a:tableStyleId>{21E4AEA4-8DFA-4A89-87EB-49C32662AFE0}</a:tableStyleId>
+                  </a:tblPr>
+                  <a:tblGrid>
+                    <a:gridCol w="1717110">
+                      <a:extLst>
+                        <a:ext uri="{9D8B030D-6E8A-4147-A177-3AD203B41FA5}">
+                          <a16:colId xmlns:a16="http://schemas.microsoft.com/office/drawing/2014/main" val="4182014441"/>
+                        </a:ext>
+                      </a:extLst>
+                    </a:gridCol>
+                    <a:gridCol w="5976462">
+                      <a:extLst>
+                        <a:ext uri="{9D8B030D-6E8A-4147-A177-3AD203B41FA5}">
+                          <a16:colId xmlns:a16="http://schemas.microsoft.com/office/drawing/2014/main" val="906180283"/>
+                        </a:ext>
+                      </a:extLst>
+                    </a:gridCol>
+                    <a:gridCol w="3026979">
+                      <a:extLst>
+                        <a:ext uri="{9D8B030D-6E8A-4147-A177-3AD203B41FA5}">
+                          <a16:colId xmlns:a16="http://schemas.microsoft.com/office/drawing/2014/main" val="2769721792"/>
+                        </a:ext>
+                      </a:extLst>
+                    </a:gridCol>
+                  </a:tblGrid>
+                  <a:tr h="370840">
+                    <a:tc>
+                      <a:txBody>
+                        <a:bodyPr/>
+                        <a:lstStyle/>
+                        <a:p>
+                          <a:r>
+                            <a:rPr lang="en-US" dirty="0"/>
+                            <a:t>Time</a:t>
+                          </a:r>
+                        </a:p>
+                      </a:txBody>
+                      <a:tcPr/>
+                    </a:tc>
+                    <a:tc>
+                      <a:txBody>
+                        <a:bodyPr/>
+                        <a:lstStyle/>
+                        <a:p>
+                          <a:r>
+                            <a:rPr lang="en-US" dirty="0"/>
+                            <a:t>Description</a:t>
+                          </a:r>
+                        </a:p>
+                      </a:txBody>
+                      <a:tcPr/>
+                    </a:tc>
+                    <a:tc>
+                      <a:txBody>
+                        <a:bodyPr/>
+                        <a:lstStyle/>
+                        <a:p>
+                          <a:r>
+                            <a:rPr lang="en-US" dirty="0"/>
+                            <a:t>Discussant</a:t>
+                          </a:r>
+                        </a:p>
+                      </a:txBody>
+                      <a:tcPr/>
+                    </a:tc>
+                    <a:extLst>
+                      <a:ext uri="{0D108BD9-81ED-4DB2-BD59-A6C34878D82A}">
+                        <a16:rowId xmlns:a16="http://schemas.microsoft.com/office/drawing/2014/main" val="1700444250"/>
+                      </a:ext>
+                    </a:extLst>
+                  </a:tr>
+                  <a:tr h="370840">
+                    <a:tc>
+                      <a:txBody>
+                        <a:bodyPr/>
+                        <a:lstStyle/>
+                        <a:p>
+                          <a:r>
+                            <a:rPr lang="en-US" dirty="0"/>
+                            <a:t>[15 min]</a:t>
+                          </a:r>
+                        </a:p>
+                      </a:txBody>
+                      <a:tcPr/>
+                    </a:tc>
+                    <a:tc>
+                      <a:txBody>
+                        <a:bodyPr/>
+                        <a:lstStyle/>
+                        <a:p>
+                          <a:r>
+                            <a:rPr lang="en-US" sz="1800" kern="1200" dirty="0">
+                              <a:solidFill>
+                                <a:schemeClr val="dk1"/>
+                              </a:solidFill>
+                              <a:effectLst/>
+                              <a:latin typeface="+mn-lt"/>
+                              <a:ea typeface="+mn-ea"/>
+                              <a:cs typeface="+mn-cs"/>
+                            </a:rPr>
+                            <a:t>(0) Introductions and administrivia </a:t>
+                          </a:r>
+                          <a:endParaRPr lang="en-US" dirty="0"/>
+                        </a:p>
+                      </a:txBody>
+                      <a:tcPr/>
+                    </a:tc>
+                    <a:tc>
+                      <a:txBody>
+                        <a:bodyPr/>
+                        <a:lstStyle/>
+                        <a:p>
+                          <a:r>
+                            <a:rPr lang="en-US" dirty="0" err="1"/>
+                            <a:t>Trikalinos</a:t>
+                          </a:r>
+                          <a:endParaRPr lang="en-US" dirty="0"/>
+                        </a:p>
+                      </a:txBody>
+                      <a:tcPr/>
+                    </a:tc>
+                    <a:extLst>
+                      <a:ext uri="{0D108BD9-81ED-4DB2-BD59-A6C34878D82A}">
+                        <a16:rowId xmlns:a16="http://schemas.microsoft.com/office/drawing/2014/main" val="2490995723"/>
+                      </a:ext>
+                    </a:extLst>
+                  </a:tr>
+                  <a:tr h="370840">
+                    <a:tc>
+                      <a:txBody>
+                        <a:bodyPr/>
+                        <a:lstStyle/>
+                        <a:p>
+                          <a:r>
+                            <a:rPr lang="en-US" dirty="0"/>
+                            <a:t>[25 min]</a:t>
+                          </a:r>
+                        </a:p>
+                      </a:txBody>
+                      <a:tcPr/>
+                    </a:tc>
+                    <a:tc>
+                      <a:txBody>
+                        <a:bodyPr/>
+                        <a:lstStyle/>
+                        <a:p>
+                          <a:r>
+                            <a:rPr lang="en-US" sz="1800" kern="1200" dirty="0">
+                              <a:solidFill>
+                                <a:schemeClr val="dk1"/>
+                              </a:solidFill>
+                              <a:effectLst/>
+                              <a:latin typeface="+mn-lt"/>
+                              <a:ea typeface="+mn-ea"/>
+                              <a:cs typeface="+mn-cs"/>
+                            </a:rPr>
+                            <a:t>(1) DES as a composition of point processes</a:t>
+                          </a:r>
+                        </a:p>
+                      </a:txBody>
+                      <a:tcPr/>
+                    </a:tc>
+                    <a:tc>
+                      <a:txBody>
+                        <a:bodyPr/>
+                        <a:lstStyle/>
+                        <a:p>
+                          <a:r>
+                            <a:rPr lang="en-US" dirty="0" err="1"/>
+                            <a:t>Alarid</a:t>
+                          </a:r>
+                          <a:r>
+                            <a:rPr lang="en-US" dirty="0"/>
+                            <a:t>-Escudero</a:t>
+                          </a:r>
+                        </a:p>
+                      </a:txBody>
+                      <a:tcPr/>
+                    </a:tc>
+                    <a:extLst>
+                      <a:ext uri="{0D108BD9-81ED-4DB2-BD59-A6C34878D82A}">
+                        <a16:rowId xmlns:a16="http://schemas.microsoft.com/office/drawing/2014/main" val="2065491183"/>
+                      </a:ext>
+                    </a:extLst>
+                  </a:tr>
+                  <a:tr h="370840">
+                    <a:tc>
+                      <a:txBody>
+                        <a:bodyPr/>
+                        <a:lstStyle/>
+                        <a:p>
+                          <a:r>
+                            <a:rPr lang="en-US" dirty="0"/>
+                            <a:t>[30 min]</a:t>
+                          </a:r>
+                        </a:p>
+                      </a:txBody>
+                      <a:tcPr/>
+                    </a:tc>
+                    <a:tc>
+                      <a:txBody>
+                        <a:bodyPr/>
+                        <a:lstStyle/>
+                        <a:p>
+                          <a:pPr marL="0" marR="0" lvl="0" indent="0" algn="l" defTabSz="914400" rtl="0" eaLnBrk="1" fontAlgn="auto" latinLnBrk="0" hangingPunct="1">
+                            <a:lnSpc>
+                              <a:spcPct val="100000"/>
+                            </a:lnSpc>
+                            <a:spcBef>
+                              <a:spcPts val="0"/>
+                            </a:spcBef>
+                            <a:spcAft>
+                              <a:spcPts val="0"/>
+                            </a:spcAft>
+                            <a:buClrTx/>
+                            <a:buSzTx/>
+                            <a:buFontTx/>
+                            <a:buNone/>
+                            <a:tabLst/>
+                            <a:defRPr/>
+                          </a:pPr>
+                          <a:r>
+                            <a:rPr lang="en-US" sz="1800" kern="1200" dirty="0">
+                              <a:solidFill>
+                                <a:schemeClr val="dk1"/>
+                              </a:solidFill>
+                              <a:effectLst/>
+                              <a:latin typeface="+mn-lt"/>
+                              <a:ea typeface="+mn-ea"/>
+                              <a:cs typeface="+mn-cs"/>
+                            </a:rPr>
+                            <a:t>(2) NHPPPs – key properties</a:t>
+                          </a:r>
+                        </a:p>
+                      </a:txBody>
+                      <a:tcPr/>
+                    </a:tc>
+                    <a:tc>
+                      <a:txBody>
+                        <a:bodyPr/>
+                        <a:lstStyle/>
+                        <a:p>
+                          <a:r>
+                            <a:rPr lang="en-US" dirty="0" err="1"/>
+                            <a:t>Trikalinos</a:t>
+                          </a:r>
+                          <a:endParaRPr lang="en-US" dirty="0"/>
+                        </a:p>
+                      </a:txBody>
+                      <a:tcPr/>
+                    </a:tc>
+                    <a:extLst>
+                      <a:ext uri="{0D108BD9-81ED-4DB2-BD59-A6C34878D82A}">
+                        <a16:rowId xmlns:a16="http://schemas.microsoft.com/office/drawing/2014/main" val="2757944147"/>
+                      </a:ext>
+                    </a:extLst>
+                  </a:tr>
+                  <a:tr h="370840">
+                    <a:tc>
+                      <a:txBody>
+                        <a:bodyPr/>
+                        <a:lstStyle/>
+                        <a:p>
+                          <a:r>
+                            <a:rPr lang="en-US" dirty="0"/>
+                            <a:t>[30 min]</a:t>
+                          </a:r>
+                        </a:p>
+                      </a:txBody>
+                      <a:tcPr/>
+                    </a:tc>
+                    <a:tc>
+                      <a:txBody>
+                        <a:bodyPr/>
+                        <a:lstStyle/>
+                        <a:p>
+                          <a:r>
+                            <a:rPr lang="en-US" sz="1800" kern="1200" dirty="0">
+                              <a:solidFill>
+                                <a:schemeClr val="dk1"/>
+                              </a:solidFill>
+                              <a:effectLst/>
+                              <a:latin typeface="+mn-lt"/>
+                              <a:ea typeface="+mn-ea"/>
+                              <a:cs typeface="+mn-cs"/>
+                            </a:rPr>
+                            <a:t>(3) Sampling from NHPPPs</a:t>
+                          </a:r>
+                          <a:endParaRPr lang="en-US" dirty="0"/>
+                        </a:p>
+                      </a:txBody>
+                      <a:tcPr/>
+                    </a:tc>
+                    <a:tc>
+                      <a:txBody>
+                        <a:bodyPr/>
+                        <a:lstStyle/>
+                        <a:p>
+                          <a:pPr marL="0" marR="0" lvl="0" indent="0" algn="l" defTabSz="914400" rtl="0" eaLnBrk="1" fontAlgn="auto" latinLnBrk="0" hangingPunct="1">
+                            <a:lnSpc>
+                              <a:spcPct val="100000"/>
+                            </a:lnSpc>
+                            <a:spcBef>
+                              <a:spcPts val="0"/>
+                            </a:spcBef>
+                            <a:spcAft>
+                              <a:spcPts val="0"/>
+                            </a:spcAft>
+                            <a:buClrTx/>
+                            <a:buSzTx/>
+                            <a:buFontTx/>
+                            <a:buNone/>
+                            <a:tabLst/>
+                            <a:defRPr/>
+                          </a:pPr>
+                          <a:r>
+                            <a:rPr lang="en-US" dirty="0"/>
+                            <a:t>Trikalinos</a:t>
+                          </a:r>
+                        </a:p>
+                      </a:txBody>
+                      <a:tcPr/>
+                    </a:tc>
+                    <a:extLst>
+                      <a:ext uri="{0D108BD9-81ED-4DB2-BD59-A6C34878D82A}">
+                        <a16:rowId xmlns:a16="http://schemas.microsoft.com/office/drawing/2014/main" val="1442363784"/>
+                      </a:ext>
+                    </a:extLst>
+                  </a:tr>
+                  <a:tr h="370840">
+                    <a:tc>
+                      <a:txBody>
+                        <a:bodyPr/>
+                        <a:lstStyle/>
+                        <a:p>
+                          <a:r>
+                            <a:rPr lang="en-US" dirty="0"/>
+                            <a:t>[15 min]</a:t>
+                          </a:r>
+                        </a:p>
+                      </a:txBody>
+                      <a:tcPr/>
+                    </a:tc>
+                    <a:tc>
+                      <a:txBody>
+                        <a:bodyPr/>
+                        <a:lstStyle/>
+                        <a:p>
+                          <a:pPr marL="0" marR="0" lvl="0" indent="0" algn="l" defTabSz="914400" rtl="0" eaLnBrk="1" fontAlgn="auto" latinLnBrk="0" hangingPunct="1">
+                            <a:lnSpc>
+                              <a:spcPct val="100000"/>
+                            </a:lnSpc>
+                            <a:spcBef>
+                              <a:spcPts val="0"/>
+                            </a:spcBef>
+                            <a:spcAft>
+                              <a:spcPts val="0"/>
+                            </a:spcAft>
+                            <a:buClrTx/>
+                            <a:buSzTx/>
+                            <a:buFontTx/>
+                            <a:buNone/>
+                            <a:tabLst/>
+                            <a:defRPr/>
+                          </a:pPr>
+                          <a:r>
+                            <a:rPr lang="en-US" b="1" dirty="0"/>
+                            <a:t>Break</a:t>
+                          </a:r>
+                        </a:p>
+                      </a:txBody>
+                      <a:tcPr/>
+                    </a:tc>
+                    <a:tc>
+                      <a:txBody>
+                        <a:bodyPr/>
+                        <a:lstStyle/>
+                        <a:p>
+                          <a:endParaRPr lang="en-US" dirty="0"/>
+                        </a:p>
+                      </a:txBody>
+                      <a:tcPr/>
+                    </a:tc>
+                    <a:extLst>
+                      <a:ext uri="{0D108BD9-81ED-4DB2-BD59-A6C34878D82A}">
+                        <a16:rowId xmlns:a16="http://schemas.microsoft.com/office/drawing/2014/main" val="1269228105"/>
+                      </a:ext>
+                    </a:extLst>
+                  </a:tr>
+                  <a:tr h="370840">
+                    <a:tc>
+                      <a:txBody>
+                        <a:bodyPr/>
+                        <a:lstStyle/>
+                        <a:p>
+                          <a:r>
+                            <a:rPr lang="en-US" dirty="0"/>
+                            <a:t>[80 min]</a:t>
+                          </a:r>
+                        </a:p>
+                      </a:txBody>
+                      <a:tcPr/>
+                    </a:tc>
+                    <a:tc>
+                      <a:txBody>
+                        <a:bodyPr/>
+                        <a:lstStyle/>
+                        <a:p>
+                          <a:r>
+                            <a:rPr lang="en-US" sz="1800" kern="1200" dirty="0">
+                              <a:solidFill>
+                                <a:schemeClr val="dk1"/>
+                              </a:solidFill>
+                              <a:effectLst/>
+                              <a:latin typeface="+mn-lt"/>
+                              <a:ea typeface="+mn-ea"/>
+                              <a:cs typeface="+mn-cs"/>
+                            </a:rPr>
+                            <a:t>(4) Working with code</a:t>
+                          </a:r>
+                        </a:p>
+                        <a:p>
+                          <a:r>
+                            <a:rPr lang="en-US" sz="1800" kern="1200" dirty="0">
+                              <a:solidFill>
+                                <a:schemeClr val="dk1"/>
+                              </a:solidFill>
+                              <a:effectLst/>
+                              <a:latin typeface="+mn-lt"/>
+                              <a:ea typeface="+mn-ea"/>
+                              <a:cs typeface="+mn-cs"/>
+                            </a:rPr>
+                            <a:t>-- Base </a:t>
+                          </a:r>
+                          <a:r>
+                            <a:rPr lang="en-US" sz="1800" kern="1200" dirty="0">
+                              <a:solidFill>
+                                <a:schemeClr val="dk1"/>
+                              </a:solidFill>
+                              <a:effectLst/>
+                              <a:latin typeface="Courier New" panose="02070309020205020404" pitchFamily="49" charset="0"/>
+                              <a:ea typeface="+mn-ea"/>
+                              <a:cs typeface="Courier New" panose="02070309020205020404" pitchFamily="49" charset="0"/>
+                            </a:rPr>
+                            <a:t>R</a:t>
+                          </a:r>
+                          <a:r>
+                            <a:rPr lang="en-US" sz="1800" kern="1200" dirty="0">
+                              <a:solidFill>
+                                <a:schemeClr val="dk1"/>
+                              </a:solidFill>
+                              <a:effectLst/>
+                              <a:latin typeface="+mn-lt"/>
+                              <a:ea typeface="+mn-ea"/>
+                              <a:cs typeface="+mn-cs"/>
+                            </a:rPr>
+                            <a:t> vs </a:t>
+                          </a:r>
+                          <a:r>
+                            <a:rPr lang="en-US" sz="1800" kern="1200" dirty="0" err="1">
+                              <a:solidFill>
+                                <a:schemeClr val="dk1"/>
+                              </a:solidFill>
+                              <a:effectLst/>
+                              <a:latin typeface="Courier New" panose="02070309020205020404" pitchFamily="49" charset="0"/>
+                              <a:ea typeface="+mn-ea"/>
+                              <a:cs typeface="Courier New" panose="02070309020205020404" pitchFamily="49" charset="0"/>
+                            </a:rPr>
+                            <a:t>nhppp</a:t>
+                          </a:r>
+                          <a:r>
+                            <a:rPr lang="en-US" sz="1800" kern="1200" dirty="0">
+                              <a:solidFill>
+                                <a:schemeClr val="dk1"/>
+                              </a:solidFill>
+                              <a:effectLst/>
+                              <a:latin typeface="+mn-lt"/>
+                              <a:ea typeface="+mn-ea"/>
+                              <a:cs typeface="+mn-cs"/>
+                            </a:rPr>
+                            <a:t>:  Simulate first vs all events in </a:t>
+                          </a:r>
+                          <a14:m>
+                            <m:oMath xmlns:m="http://schemas.openxmlformats.org/officeDocument/2006/math">
+                              <m:r>
+                                <a:rPr lang="en-US" sz="1800" b="0" i="1" kern="1200" smtClean="0">
+                                  <a:solidFill>
+                                    <a:schemeClr val="dk1"/>
+                                  </a:solidFill>
+                                  <a:effectLst/>
+                                  <a:latin typeface="Cambria Math" panose="02040503050406030204" pitchFamily="18" charset="0"/>
+                                  <a:ea typeface="+mn-ea"/>
+                                  <a:cs typeface="+mn-cs"/>
+                                </a:rPr>
+                                <m:t>(</m:t>
+                              </m:r>
+                              <m:r>
+                                <m:rPr>
+                                  <m:sty m:val="p"/>
+                                </m:rPr>
+                                <a:rPr lang="en-US" sz="1800" b="0" i="1" kern="1200" smtClean="0">
+                                  <a:solidFill>
+                                    <a:schemeClr val="dk1"/>
+                                  </a:solidFill>
+                                  <a:effectLst/>
+                                  <a:latin typeface="Cambria Math" panose="02040503050406030204" pitchFamily="18" charset="0"/>
+                                  <a:ea typeface="+mn-ea"/>
+                                  <a:cs typeface="+mn-cs"/>
+                                </a:rPr>
+                                <m:t>a</m:t>
+                              </m:r>
+                              <m:r>
+                                <a:rPr lang="en-US" sz="1800" b="0" i="1" kern="1200" smtClean="0">
+                                  <a:solidFill>
+                                    <a:schemeClr val="dk1"/>
+                                  </a:solidFill>
+                                  <a:effectLst/>
+                                  <a:latin typeface="Cambria Math" panose="02040503050406030204" pitchFamily="18" charset="0"/>
+                                  <a:ea typeface="+mn-ea"/>
+                                  <a:cs typeface="+mn-cs"/>
+                                </a:rPr>
+                                <m:t>,</m:t>
+                              </m:r>
+                              <m:r>
+                                <m:rPr>
+                                  <m:sty m:val="p"/>
+                                </m:rPr>
+                                <a:rPr lang="en-US" sz="1800" b="0" i="1" kern="1200" smtClean="0">
+                                  <a:solidFill>
+                                    <a:schemeClr val="dk1"/>
+                                  </a:solidFill>
+                                  <a:effectLst/>
+                                  <a:latin typeface="Cambria Math" panose="02040503050406030204" pitchFamily="18" charset="0"/>
+                                  <a:ea typeface="+mn-ea"/>
+                                  <a:cs typeface="+mn-cs"/>
+                                </a:rPr>
+                                <m:t>b</m:t>
+                              </m:r>
+                              <m:r>
+                                <a:rPr lang="en-US" sz="1800" b="0" i="1" kern="1200" smtClean="0">
+                                  <a:solidFill>
+                                    <a:schemeClr val="dk1"/>
+                                  </a:solidFill>
+                                  <a:effectLst/>
+                                  <a:latin typeface="Cambria Math" panose="02040503050406030204" pitchFamily="18" charset="0"/>
+                                  <a:ea typeface="+mn-ea"/>
+                                  <a:cs typeface="+mn-cs"/>
+                                </a:rPr>
+                                <m:t>]</m:t>
+                              </m:r>
+                            </m:oMath>
+                          </a14:m>
+                          <a:endParaRPr lang="en-US" sz="1800" kern="1200" dirty="0">
+                            <a:solidFill>
+                              <a:schemeClr val="dk1"/>
+                            </a:solidFill>
+                            <a:effectLst/>
+                            <a:latin typeface="+mn-lt"/>
+                            <a:ea typeface="+mn-ea"/>
+                            <a:cs typeface="+mn-cs"/>
+                          </a:endParaRPr>
+                        </a:p>
+                        <a:p>
+                          <a:r>
+                            <a:rPr lang="en-US" sz="1800" kern="1200" dirty="0">
+                              <a:solidFill>
+                                <a:schemeClr val="dk1"/>
+                              </a:solidFill>
+                              <a:effectLst/>
+                              <a:latin typeface="+mn-lt"/>
+                              <a:ea typeface="+mn-ea"/>
+                              <a:cs typeface="+mn-cs"/>
+                            </a:rPr>
+                            <a:t>-- Packaging a simple cancer DES </a:t>
+                          </a:r>
+                        </a:p>
+                        <a:p>
+                          <a:r>
+                            <a:rPr lang="en-US" sz="1800" kern="1200" dirty="0">
+                              <a:solidFill>
+                                <a:schemeClr val="dk1"/>
+                              </a:solidFill>
+                              <a:effectLst/>
+                              <a:latin typeface="+mn-lt"/>
+                              <a:ea typeface="+mn-ea"/>
+                              <a:cs typeface="+mn-cs"/>
+                            </a:rPr>
+                            <a:t>-- The vectorized case </a:t>
+                          </a:r>
+                        </a:p>
+                      </a:txBody>
+                      <a:tcPr/>
+                    </a:tc>
+                    <a:tc>
+                      <a:txBody>
+                        <a:bodyPr/>
+                        <a:lstStyle/>
+                        <a:p>
+                          <a:r>
+                            <a:rPr lang="en-US" dirty="0"/>
+                            <a:t>[All]</a:t>
+                          </a:r>
+                        </a:p>
+                        <a:p>
+                          <a:r>
+                            <a:rPr lang="en-US" dirty="0"/>
+                            <a:t>Trikalinos</a:t>
+                          </a:r>
+                        </a:p>
+                        <a:p>
+                          <a:r>
+                            <a:rPr lang="en-US" dirty="0"/>
+                            <a:t>Sereda</a:t>
+                          </a:r>
+                        </a:p>
+                        <a:p>
+                          <a:pPr marL="0" marR="0" lvl="0" indent="0" algn="l" defTabSz="914400" rtl="0" eaLnBrk="1" fontAlgn="auto" latinLnBrk="0" hangingPunct="1">
+                            <a:lnSpc>
+                              <a:spcPct val="100000"/>
+                            </a:lnSpc>
+                            <a:spcBef>
+                              <a:spcPts val="0"/>
+                            </a:spcBef>
+                            <a:spcAft>
+                              <a:spcPts val="0"/>
+                            </a:spcAft>
+                            <a:buClrTx/>
+                            <a:buSzTx/>
+                            <a:buFontTx/>
+                            <a:buNone/>
+                            <a:tabLst/>
+                            <a:defRPr/>
+                          </a:pPr>
+                          <a:r>
+                            <a:rPr lang="en-US" dirty="0"/>
+                            <a:t>Sereda</a:t>
+                          </a:r>
+                        </a:p>
+                      </a:txBody>
+                      <a:tcPr/>
+                    </a:tc>
+                    <a:extLst>
+                      <a:ext uri="{0D108BD9-81ED-4DB2-BD59-A6C34878D82A}">
+                        <a16:rowId xmlns:a16="http://schemas.microsoft.com/office/drawing/2014/main" val="1448491104"/>
+                      </a:ext>
+                    </a:extLst>
+                  </a:tr>
+                  <a:tr h="370840">
+                    <a:tc>
+                      <a:txBody>
+                        <a:bodyPr/>
+                        <a:lstStyle/>
+                        <a:p>
+                          <a:r>
+                            <a:rPr lang="en-US" dirty="0"/>
+                            <a:t>[5 min]</a:t>
+                          </a:r>
+                        </a:p>
+                      </a:txBody>
+                      <a:tcPr/>
+                    </a:tc>
+                    <a:tc>
+                      <a:txBody>
+                        <a:bodyPr/>
+                        <a:lstStyle/>
+                        <a:p>
+                          <a:pPr marL="0" marR="0" lvl="0" indent="0" algn="l" defTabSz="914400" rtl="0" eaLnBrk="1" fontAlgn="auto" latinLnBrk="0" hangingPunct="1">
+                            <a:lnSpc>
+                              <a:spcPct val="100000"/>
+                            </a:lnSpc>
+                            <a:spcBef>
+                              <a:spcPts val="0"/>
+                            </a:spcBef>
+                            <a:spcAft>
+                              <a:spcPts val="0"/>
+                            </a:spcAft>
+                            <a:buClrTx/>
+                            <a:buSzTx/>
+                            <a:buFontTx/>
+                            <a:buNone/>
+                            <a:tabLst/>
+                            <a:defRPr/>
+                          </a:pPr>
+                          <a:r>
+                            <a:rPr lang="en-US" sz="1800" kern="1200" dirty="0">
+                              <a:solidFill>
+                                <a:schemeClr val="dk1"/>
+                              </a:solidFill>
+                              <a:effectLst/>
+                              <a:latin typeface="+mn-lt"/>
+                              <a:ea typeface="+mn-ea"/>
+                              <a:cs typeface="+mn-cs"/>
+                            </a:rPr>
+                            <a:t>(5) Advanced Topic Teaser on self-excitatory processes: point processes that are not NHPPPs and when you may need them</a:t>
+                          </a:r>
+                        </a:p>
+                      </a:txBody>
+                      <a:tcPr/>
+                    </a:tc>
+                    <a:tc>
+                      <a:txBody>
+                        <a:bodyPr/>
+                        <a:lstStyle/>
+                        <a:p>
+                          <a:r>
+                            <a:rPr lang="en-US" dirty="0"/>
+                            <a:t>Trikalinos</a:t>
+                          </a:r>
+                        </a:p>
+                      </a:txBody>
+                      <a:tcPr/>
+                    </a:tc>
+                    <a:extLst>
+                      <a:ext uri="{0D108BD9-81ED-4DB2-BD59-A6C34878D82A}">
+                        <a16:rowId xmlns:a16="http://schemas.microsoft.com/office/drawing/2014/main" val="3766472740"/>
+                      </a:ext>
+                    </a:extLst>
+                  </a:tr>
+                  <a:tr h="370840">
+                    <a:tc>
+                      <a:txBody>
+                        <a:bodyPr/>
+                        <a:lstStyle/>
+                        <a:p>
+                          <a:r>
+                            <a:rPr lang="en-US" dirty="0"/>
+                            <a:t>[15 min]</a:t>
+                          </a:r>
+                        </a:p>
+                      </a:txBody>
+                      <a:tcPr/>
+                    </a:tc>
+                    <a:tc>
+                      <a:txBody>
+                        <a:bodyPr/>
+                        <a:lstStyle/>
+                        <a:p>
+                          <a:r>
+                            <a:rPr lang="en-US" dirty="0"/>
+                            <a:t>General Q &amp; A</a:t>
+                          </a:r>
+                        </a:p>
+                      </a:txBody>
+                      <a:tcPr/>
+                    </a:tc>
+                    <a:tc>
+                      <a:txBody>
+                        <a:bodyPr/>
+                        <a:lstStyle/>
+                        <a:p>
+                          <a:r>
+                            <a:rPr lang="en-US" dirty="0"/>
+                            <a:t>All</a:t>
+                          </a:r>
+                        </a:p>
+                      </a:txBody>
+                      <a:tcPr/>
+                    </a:tc>
+                    <a:extLst>
+                      <a:ext uri="{0D108BD9-81ED-4DB2-BD59-A6C34878D82A}">
+                        <a16:rowId xmlns:a16="http://schemas.microsoft.com/office/drawing/2014/main" val="3034331301"/>
+                      </a:ext>
+                    </a:extLst>
+                  </a:tr>
+                </a:tbl>
+              </a:graphicData>
+            </a:graphic>
+          </p:graphicFrame>
+        </mc:Choice>
+        <mc:Fallback xmlns="">
+          <p:graphicFrame>
+            <p:nvGraphicFramePr>
+              <p:cNvPr id="7" name="Content Placeholder 3">
+                <a:extLst>
+                  <a:ext uri="{FF2B5EF4-FFF2-40B4-BE49-F238E27FC236}">
+                    <a16:creationId xmlns:a16="http://schemas.microsoft.com/office/drawing/2014/main" id="{1A8641C2-97EF-114F-E719-C84F3CF99A82}"/>
+                  </a:ext>
+                </a:extLst>
+              </p:cNvPr>
+              <p:cNvGraphicFramePr>
+                <a:graphicFrameLocks noGrp="1"/>
+              </p:cNvGraphicFramePr>
+              <p:nvPr>
+                <p:ph idx="1"/>
+                <p:extLst>
+                  <p:ext uri="{D42A27DB-BD31-4B8C-83A1-F6EECF244321}">
+                    <p14:modId xmlns:p14="http://schemas.microsoft.com/office/powerpoint/2010/main" val="260976388"/>
+                  </p:ext>
+                </p:extLst>
+              </p:nvPr>
+            </p:nvGraphicFramePr>
+            <p:xfrm>
+              <a:off x="1208690" y="942340"/>
+              <a:ext cx="10720551" cy="4699000"/>
+            </p:xfrm>
+            <a:graphic>
+              <a:graphicData uri="http://schemas.openxmlformats.org/drawingml/2006/table">
+                <a:tbl>
+                  <a:tblPr firstRow="1" bandRow="1">
+                    <a:tableStyleId>{21E4AEA4-8DFA-4A89-87EB-49C32662AFE0}</a:tableStyleId>
+                  </a:tblPr>
+                  <a:tblGrid>
+                    <a:gridCol w="1717110">
+                      <a:extLst>
+                        <a:ext uri="{9D8B030D-6E8A-4147-A177-3AD203B41FA5}">
+                          <a16:colId xmlns:a16="http://schemas.microsoft.com/office/drawing/2014/main" val="4182014441"/>
+                        </a:ext>
+                      </a:extLst>
+                    </a:gridCol>
+                    <a:gridCol w="5976462">
+                      <a:extLst>
+                        <a:ext uri="{9D8B030D-6E8A-4147-A177-3AD203B41FA5}">
+                          <a16:colId xmlns:a16="http://schemas.microsoft.com/office/drawing/2014/main" val="906180283"/>
+                        </a:ext>
+                      </a:extLst>
+                    </a:gridCol>
+                    <a:gridCol w="3026979">
+                      <a:extLst>
+                        <a:ext uri="{9D8B030D-6E8A-4147-A177-3AD203B41FA5}">
+                          <a16:colId xmlns:a16="http://schemas.microsoft.com/office/drawing/2014/main" val="2769721792"/>
+                        </a:ext>
+                      </a:extLst>
+                    </a:gridCol>
+                  </a:tblGrid>
+                  <a:tr h="370840">
+                    <a:tc>
+                      <a:txBody>
+                        <a:bodyPr/>
+                        <a:lstStyle/>
+                        <a:p>
+                          <a:r>
+                            <a:rPr lang="en-US" dirty="0"/>
+                            <a:t>Time</a:t>
+                          </a:r>
+                        </a:p>
+                      </a:txBody>
+                      <a:tcPr/>
+                    </a:tc>
+                    <a:tc>
+                      <a:txBody>
+                        <a:bodyPr/>
+                        <a:lstStyle/>
+                        <a:p>
+                          <a:r>
+                            <a:rPr lang="en-US" dirty="0"/>
+                            <a:t>Description</a:t>
+                          </a:r>
+                        </a:p>
+                      </a:txBody>
+                      <a:tcPr/>
+                    </a:tc>
+                    <a:tc>
+                      <a:txBody>
+                        <a:bodyPr/>
+                        <a:lstStyle/>
+                        <a:p>
+                          <a:r>
+                            <a:rPr lang="en-US" dirty="0"/>
+                            <a:t>Discussant</a:t>
+                          </a:r>
+                        </a:p>
+                      </a:txBody>
+                      <a:tcPr/>
+                    </a:tc>
+                    <a:extLst>
+                      <a:ext uri="{0D108BD9-81ED-4DB2-BD59-A6C34878D82A}">
+                        <a16:rowId xmlns:a16="http://schemas.microsoft.com/office/drawing/2014/main" val="1700444250"/>
+                      </a:ext>
+                    </a:extLst>
+                  </a:tr>
+                  <a:tr h="370840">
+                    <a:tc>
+                      <a:txBody>
+                        <a:bodyPr/>
+                        <a:lstStyle/>
+                        <a:p>
+                          <a:r>
+                            <a:rPr lang="en-US" dirty="0"/>
+                            <a:t>[15 min]</a:t>
+                          </a:r>
+                        </a:p>
+                      </a:txBody>
+                      <a:tcPr/>
+                    </a:tc>
+                    <a:tc>
+                      <a:txBody>
+                        <a:bodyPr/>
+                        <a:lstStyle/>
+                        <a:p>
+                          <a:r>
+                            <a:rPr lang="en-US" sz="1800" kern="1200" dirty="0">
+                              <a:solidFill>
+                                <a:schemeClr val="dk1"/>
+                              </a:solidFill>
+                              <a:effectLst/>
+                              <a:latin typeface="+mn-lt"/>
+                              <a:ea typeface="+mn-ea"/>
+                              <a:cs typeface="+mn-cs"/>
+                            </a:rPr>
+                            <a:t>(0) Introductions and administrivia </a:t>
+                          </a:r>
+                          <a:endParaRPr lang="en-US" dirty="0"/>
+                        </a:p>
+                      </a:txBody>
+                      <a:tcPr/>
+                    </a:tc>
+                    <a:tc>
+                      <a:txBody>
+                        <a:bodyPr/>
+                        <a:lstStyle/>
+                        <a:p>
+                          <a:r>
+                            <a:rPr lang="en-US" dirty="0" err="1"/>
+                            <a:t>Trikalinos</a:t>
+                          </a:r>
+                          <a:endParaRPr lang="en-US" dirty="0"/>
+                        </a:p>
+                      </a:txBody>
+                      <a:tcPr/>
+                    </a:tc>
+                    <a:extLst>
+                      <a:ext uri="{0D108BD9-81ED-4DB2-BD59-A6C34878D82A}">
+                        <a16:rowId xmlns:a16="http://schemas.microsoft.com/office/drawing/2014/main" val="2490995723"/>
+                      </a:ext>
+                    </a:extLst>
+                  </a:tr>
+                  <a:tr h="370840">
+                    <a:tc>
+                      <a:txBody>
+                        <a:bodyPr/>
+                        <a:lstStyle/>
+                        <a:p>
+                          <a:r>
+                            <a:rPr lang="en-US" dirty="0"/>
+                            <a:t>[25 min]</a:t>
+                          </a:r>
+                        </a:p>
+                      </a:txBody>
+                      <a:tcPr/>
+                    </a:tc>
+                    <a:tc>
+                      <a:txBody>
+                        <a:bodyPr/>
+                        <a:lstStyle/>
+                        <a:p>
+                          <a:r>
+                            <a:rPr lang="en-US" sz="1800" kern="1200" dirty="0">
+                              <a:solidFill>
+                                <a:schemeClr val="dk1"/>
+                              </a:solidFill>
+                              <a:effectLst/>
+                              <a:latin typeface="+mn-lt"/>
+                              <a:ea typeface="+mn-ea"/>
+                              <a:cs typeface="+mn-cs"/>
+                            </a:rPr>
+                            <a:t>(1) DES as a composition of point processes</a:t>
+                          </a:r>
+                        </a:p>
+                      </a:txBody>
+                      <a:tcPr/>
+                    </a:tc>
+                    <a:tc>
+                      <a:txBody>
+                        <a:bodyPr/>
+                        <a:lstStyle/>
+                        <a:p>
+                          <a:r>
+                            <a:rPr lang="en-US" dirty="0" err="1"/>
+                            <a:t>Alarid</a:t>
+                          </a:r>
+                          <a:r>
+                            <a:rPr lang="en-US" dirty="0"/>
+                            <a:t>-Escudero</a:t>
+                          </a:r>
+                        </a:p>
+                      </a:txBody>
+                      <a:tcPr/>
+                    </a:tc>
+                    <a:extLst>
+                      <a:ext uri="{0D108BD9-81ED-4DB2-BD59-A6C34878D82A}">
+                        <a16:rowId xmlns:a16="http://schemas.microsoft.com/office/drawing/2014/main" val="2065491183"/>
+                      </a:ext>
+                    </a:extLst>
+                  </a:tr>
+                  <a:tr h="370840">
+                    <a:tc>
+                      <a:txBody>
+                        <a:bodyPr/>
+                        <a:lstStyle/>
+                        <a:p>
+                          <a:r>
+                            <a:rPr lang="en-US" dirty="0"/>
+                            <a:t>[30 min]</a:t>
+                          </a:r>
+                        </a:p>
+                      </a:txBody>
+                      <a:tcPr/>
+                    </a:tc>
+                    <a:tc>
+                      <a:txBody>
+                        <a:bodyPr/>
+                        <a:lstStyle/>
+                        <a:p>
+                          <a:pPr marL="0" marR="0" lvl="0" indent="0" algn="l" defTabSz="914400" rtl="0" eaLnBrk="1" fontAlgn="auto" latinLnBrk="0" hangingPunct="1">
+                            <a:lnSpc>
+                              <a:spcPct val="100000"/>
+                            </a:lnSpc>
+                            <a:spcBef>
+                              <a:spcPts val="0"/>
+                            </a:spcBef>
+                            <a:spcAft>
+                              <a:spcPts val="0"/>
+                            </a:spcAft>
+                            <a:buClrTx/>
+                            <a:buSzTx/>
+                            <a:buFontTx/>
+                            <a:buNone/>
+                            <a:tabLst/>
+                            <a:defRPr/>
+                          </a:pPr>
+                          <a:r>
+                            <a:rPr lang="en-US" sz="1800" kern="1200" dirty="0">
+                              <a:solidFill>
+                                <a:schemeClr val="dk1"/>
+                              </a:solidFill>
+                              <a:effectLst/>
+                              <a:latin typeface="+mn-lt"/>
+                              <a:ea typeface="+mn-ea"/>
+                              <a:cs typeface="+mn-cs"/>
+                            </a:rPr>
+                            <a:t>(2) NHPPPs – key properties</a:t>
+                          </a:r>
+                        </a:p>
+                      </a:txBody>
+                      <a:tcPr/>
+                    </a:tc>
+                    <a:tc>
+                      <a:txBody>
+                        <a:bodyPr/>
+                        <a:lstStyle/>
+                        <a:p>
+                          <a:r>
+                            <a:rPr lang="en-US" dirty="0" err="1"/>
+                            <a:t>Trikalinos</a:t>
+                          </a:r>
+                          <a:endParaRPr lang="en-US" dirty="0"/>
+                        </a:p>
+                      </a:txBody>
+                      <a:tcPr/>
+                    </a:tc>
+                    <a:extLst>
+                      <a:ext uri="{0D108BD9-81ED-4DB2-BD59-A6C34878D82A}">
+                        <a16:rowId xmlns:a16="http://schemas.microsoft.com/office/drawing/2014/main" val="2757944147"/>
+                      </a:ext>
+                    </a:extLst>
+                  </a:tr>
+                  <a:tr h="370840">
+                    <a:tc>
+                      <a:txBody>
+                        <a:bodyPr/>
+                        <a:lstStyle/>
+                        <a:p>
+                          <a:r>
+                            <a:rPr lang="en-US" dirty="0"/>
+                            <a:t>[30 min]</a:t>
+                          </a:r>
+                        </a:p>
+                      </a:txBody>
+                      <a:tcPr/>
+                    </a:tc>
+                    <a:tc>
+                      <a:txBody>
+                        <a:bodyPr/>
+                        <a:lstStyle/>
+                        <a:p>
+                          <a:r>
+                            <a:rPr lang="en-US" sz="1800" kern="1200" dirty="0">
+                              <a:solidFill>
+                                <a:schemeClr val="dk1"/>
+                              </a:solidFill>
+                              <a:effectLst/>
+                              <a:latin typeface="+mn-lt"/>
+                              <a:ea typeface="+mn-ea"/>
+                              <a:cs typeface="+mn-cs"/>
+                            </a:rPr>
+                            <a:t>(3) Sampling from NHPPPs</a:t>
+                          </a:r>
+                          <a:endParaRPr lang="en-US" dirty="0"/>
+                        </a:p>
+                      </a:txBody>
+                      <a:tcPr/>
+                    </a:tc>
+                    <a:tc>
+                      <a:txBody>
+                        <a:bodyPr/>
+                        <a:lstStyle/>
+                        <a:p>
+                          <a:pPr marL="0" marR="0" lvl="0" indent="0" algn="l" defTabSz="914400" rtl="0" eaLnBrk="1" fontAlgn="auto" latinLnBrk="0" hangingPunct="1">
+                            <a:lnSpc>
+                              <a:spcPct val="100000"/>
+                            </a:lnSpc>
+                            <a:spcBef>
+                              <a:spcPts val="0"/>
+                            </a:spcBef>
+                            <a:spcAft>
+                              <a:spcPts val="0"/>
+                            </a:spcAft>
+                            <a:buClrTx/>
+                            <a:buSzTx/>
+                            <a:buFontTx/>
+                            <a:buNone/>
+                            <a:tabLst/>
+                            <a:defRPr/>
+                          </a:pPr>
+                          <a:r>
+                            <a:rPr lang="en-US" dirty="0"/>
+                            <a:t>Trikalinos</a:t>
+                          </a:r>
+                        </a:p>
+                      </a:txBody>
+                      <a:tcPr/>
+                    </a:tc>
+                    <a:extLst>
+                      <a:ext uri="{0D108BD9-81ED-4DB2-BD59-A6C34878D82A}">
+                        <a16:rowId xmlns:a16="http://schemas.microsoft.com/office/drawing/2014/main" val="1442363784"/>
+                      </a:ext>
+                    </a:extLst>
+                  </a:tr>
+                  <a:tr h="370840">
+                    <a:tc>
+                      <a:txBody>
+                        <a:bodyPr/>
+                        <a:lstStyle/>
+                        <a:p>
+                          <a:r>
+                            <a:rPr lang="en-US" dirty="0"/>
+                            <a:t>[15 min]</a:t>
+                          </a:r>
+                        </a:p>
+                      </a:txBody>
+                      <a:tcPr/>
+                    </a:tc>
+                    <a:tc>
+                      <a:txBody>
+                        <a:bodyPr/>
+                        <a:lstStyle/>
+                        <a:p>
+                          <a:pPr marL="0" marR="0" lvl="0" indent="0" algn="l" defTabSz="914400" rtl="0" eaLnBrk="1" fontAlgn="auto" latinLnBrk="0" hangingPunct="1">
+                            <a:lnSpc>
+                              <a:spcPct val="100000"/>
+                            </a:lnSpc>
+                            <a:spcBef>
+                              <a:spcPts val="0"/>
+                            </a:spcBef>
+                            <a:spcAft>
+                              <a:spcPts val="0"/>
+                            </a:spcAft>
+                            <a:buClrTx/>
+                            <a:buSzTx/>
+                            <a:buFontTx/>
+                            <a:buNone/>
+                            <a:tabLst/>
+                            <a:defRPr/>
+                          </a:pPr>
+                          <a:r>
+                            <a:rPr lang="en-US" b="1" dirty="0"/>
+                            <a:t>Break</a:t>
+                          </a:r>
+                        </a:p>
+                      </a:txBody>
+                      <a:tcPr/>
+                    </a:tc>
+                    <a:tc>
+                      <a:txBody>
+                        <a:bodyPr/>
+                        <a:lstStyle/>
+                        <a:p>
+                          <a:endParaRPr lang="en-US" dirty="0"/>
+                        </a:p>
+                      </a:txBody>
+                      <a:tcPr/>
+                    </a:tc>
+                    <a:extLst>
+                      <a:ext uri="{0D108BD9-81ED-4DB2-BD59-A6C34878D82A}">
+                        <a16:rowId xmlns:a16="http://schemas.microsoft.com/office/drawing/2014/main" val="1269228105"/>
+                      </a:ext>
+                    </a:extLst>
+                  </a:tr>
+                  <a:tr h="1188720">
+                    <a:tc>
+                      <a:txBody>
+                        <a:bodyPr/>
+                        <a:lstStyle/>
+                        <a:p>
+                          <a:r>
+                            <a:rPr lang="en-US" dirty="0"/>
+                            <a:t>[80 min]</a:t>
+                          </a:r>
+                        </a:p>
+                      </a:txBody>
+                      <a:tcPr/>
+                    </a:tc>
+                    <a:tc>
+                      <a:txBody>
+                        <a:bodyPr/>
+                        <a:lstStyle/>
+                        <a:p>
+                          <a:endParaRPr lang="en-US"/>
+                        </a:p>
+                      </a:txBody>
+                      <a:tcPr>
+                        <a:blipFill>
+                          <a:blip r:embed="rId2"/>
+                          <a:stretch>
+                            <a:fillRect l="-28875" t="-189362" r="-51168" b="-114894"/>
+                          </a:stretch>
+                        </a:blipFill>
+                      </a:tcPr>
+                    </a:tc>
+                    <a:tc>
+                      <a:txBody>
+                        <a:bodyPr/>
+                        <a:lstStyle/>
+                        <a:p>
+                          <a:r>
+                            <a:rPr lang="en-US" dirty="0"/>
+                            <a:t>[All]</a:t>
+                          </a:r>
+                        </a:p>
+                        <a:p>
+                          <a:r>
+                            <a:rPr lang="en-US" dirty="0"/>
+                            <a:t>Trikalinos</a:t>
+                          </a:r>
+                        </a:p>
+                        <a:p>
+                          <a:r>
+                            <a:rPr lang="en-US" dirty="0"/>
+                            <a:t>Sereda</a:t>
+                          </a:r>
+                        </a:p>
+                        <a:p>
+                          <a:pPr marL="0" marR="0" lvl="0" indent="0" algn="l" defTabSz="914400" rtl="0" eaLnBrk="1" fontAlgn="auto" latinLnBrk="0" hangingPunct="1">
+                            <a:lnSpc>
+                              <a:spcPct val="100000"/>
+                            </a:lnSpc>
+                            <a:spcBef>
+                              <a:spcPts val="0"/>
+                            </a:spcBef>
+                            <a:spcAft>
+                              <a:spcPts val="0"/>
+                            </a:spcAft>
+                            <a:buClrTx/>
+                            <a:buSzTx/>
+                            <a:buFontTx/>
+                            <a:buNone/>
+                            <a:tabLst/>
+                            <a:defRPr/>
+                          </a:pPr>
+                          <a:r>
+                            <a:rPr lang="en-US" dirty="0"/>
+                            <a:t>Sereda</a:t>
+                          </a:r>
+                        </a:p>
+                      </a:txBody>
+                      <a:tcPr/>
+                    </a:tc>
+                    <a:extLst>
+                      <a:ext uri="{0D108BD9-81ED-4DB2-BD59-A6C34878D82A}">
+                        <a16:rowId xmlns:a16="http://schemas.microsoft.com/office/drawing/2014/main" val="1448491104"/>
+                      </a:ext>
+                    </a:extLst>
+                  </a:tr>
+                  <a:tr h="914400">
+                    <a:tc>
+                      <a:txBody>
+                        <a:bodyPr/>
+                        <a:lstStyle/>
+                        <a:p>
+                          <a:r>
+                            <a:rPr lang="en-US" dirty="0"/>
+                            <a:t>[5 min]</a:t>
+                          </a:r>
+                        </a:p>
+                      </a:txBody>
+                      <a:tcPr/>
+                    </a:tc>
+                    <a:tc>
+                      <a:txBody>
+                        <a:bodyPr/>
+                        <a:lstStyle/>
+                        <a:p>
+                          <a:pPr marL="0" marR="0" lvl="0" indent="0" algn="l" defTabSz="914400" rtl="0" eaLnBrk="1" fontAlgn="auto" latinLnBrk="0" hangingPunct="1">
+                            <a:lnSpc>
+                              <a:spcPct val="100000"/>
+                            </a:lnSpc>
+                            <a:spcBef>
+                              <a:spcPts val="0"/>
+                            </a:spcBef>
+                            <a:spcAft>
+                              <a:spcPts val="0"/>
+                            </a:spcAft>
+                            <a:buClrTx/>
+                            <a:buSzTx/>
+                            <a:buFontTx/>
+                            <a:buNone/>
+                            <a:tabLst/>
+                            <a:defRPr/>
+                          </a:pPr>
+                          <a:r>
+                            <a:rPr lang="en-US" sz="1800" kern="1200" dirty="0">
+                              <a:solidFill>
+                                <a:schemeClr val="dk1"/>
+                              </a:solidFill>
+                              <a:effectLst/>
+                              <a:latin typeface="+mn-lt"/>
+                              <a:ea typeface="+mn-ea"/>
+                              <a:cs typeface="+mn-cs"/>
+                            </a:rPr>
+                            <a:t>(5) Advanced Topic Teaser on self-excitatory processes: point processes that are not NHPPPs and when you may need them</a:t>
+                          </a:r>
+                        </a:p>
+                      </a:txBody>
+                      <a:tcPr/>
+                    </a:tc>
+                    <a:tc>
+                      <a:txBody>
+                        <a:bodyPr/>
+                        <a:lstStyle/>
+                        <a:p>
+                          <a:r>
+                            <a:rPr lang="en-US" dirty="0"/>
+                            <a:t>Trikalinos</a:t>
+                          </a:r>
+                        </a:p>
+                      </a:txBody>
+                      <a:tcPr/>
+                    </a:tc>
+                    <a:extLst>
+                      <a:ext uri="{0D108BD9-81ED-4DB2-BD59-A6C34878D82A}">
+                        <a16:rowId xmlns:a16="http://schemas.microsoft.com/office/drawing/2014/main" val="3766472740"/>
+                      </a:ext>
+                    </a:extLst>
+                  </a:tr>
+                  <a:tr h="370840">
+                    <a:tc>
+                      <a:txBody>
+                        <a:bodyPr/>
+                        <a:lstStyle/>
+                        <a:p>
+                          <a:r>
+                            <a:rPr lang="en-US" dirty="0"/>
+                            <a:t>[15 min]</a:t>
+                          </a:r>
+                        </a:p>
+                      </a:txBody>
+                      <a:tcPr/>
+                    </a:tc>
+                    <a:tc>
+                      <a:txBody>
+                        <a:bodyPr/>
+                        <a:lstStyle/>
+                        <a:p>
+                          <a:r>
+                            <a:rPr lang="en-US" dirty="0"/>
+                            <a:t>General Q &amp; A</a:t>
+                          </a:r>
+                        </a:p>
+                      </a:txBody>
+                      <a:tcPr/>
+                    </a:tc>
+                    <a:tc>
+                      <a:txBody>
+                        <a:bodyPr/>
+                        <a:lstStyle/>
+                        <a:p>
+                          <a:r>
+                            <a:rPr lang="en-US" dirty="0"/>
+                            <a:t>All</a:t>
+                          </a:r>
+                        </a:p>
+                      </a:txBody>
+                      <a:tcPr/>
+                    </a:tc>
+                    <a:extLst>
+                      <a:ext uri="{0D108BD9-81ED-4DB2-BD59-A6C34878D82A}">
+                        <a16:rowId xmlns:a16="http://schemas.microsoft.com/office/drawing/2014/main" val="3034331301"/>
+                      </a:ext>
+                    </a:extLst>
+                  </a:tr>
+                </a:tbl>
+              </a:graphicData>
+            </a:graphic>
+          </p:graphicFrame>
+        </mc:Fallback>
+      </mc:AlternateContent>
       <p:sp>
         <p:nvSpPr>
-          <p:cNvPr id="3" name="TextBox 2">
+          <p:cNvPr id="8" name="TextBox 7">
             <a:extLst>
               <a:ext uri="{FF2B5EF4-FFF2-40B4-BE49-F238E27FC236}">
-                <a16:creationId xmlns:a16="http://schemas.microsoft.com/office/drawing/2014/main" id="{4E2006C5-5DE3-1FA4-F3B4-E00463E51CA0}"/>
+                <a16:creationId xmlns:a16="http://schemas.microsoft.com/office/drawing/2014/main" id="{620C710C-12D5-B352-4147-1183748F4899}"/>
               </a:ext>
             </a:extLst>
           </p:cNvPr>
@@ -4444,7 +5208,7 @@
           <a:p>
             <a:r>
               <a:rPr lang="en-US" sz="2400" dirty="0"/>
-              <a:t>Sunday 15</a:t>
+              <a:t>Sunday 28</a:t>
             </a:r>
             <a:r>
               <a:rPr lang="en-US" sz="2400" baseline="30000" dirty="0"/>
@@ -4452,7 +5216,17 @@
             </a:r>
             <a:r>
               <a:rPr lang="en-US" sz="2400" dirty="0"/>
-              <a:t> of June, 9:00 to 12:30</a:t>
+              <a:t> of June, 8:35 to 12:</a:t>
+            </a:r>
+            <a:r>
+              <a:rPr lang="en-US" sz="2400" dirty="0">
+                <a:sym typeface="Wingdings" pitchFamily="2" charset="2"/>
+              </a:rPr>
+              <a:t>0</a:t>
+            </a:r>
+            <a:r>
+              <a:rPr lang="en-US" sz="2400" dirty="0"/>
+              <a:t>0</a:t>
             </a:r>
           </a:p>
         </p:txBody>
@@ -4512,8 +5286,13 @@
           <a:p>
             <a:r>
               <a:rPr lang="en-US" dirty="0"/>
-              <a:t>Section 4: Simple DES</a:t>
-            </a:r>
+              <a:t>Section 4: </a:t>
+            </a:r>
+            <a:r>
+              <a:rPr lang="en-US"/>
+              <a:t>Simple DES (in code)</a:t>
+            </a:r>
+            <a:endParaRPr lang="en-US" dirty="0"/>
           </a:p>
         </p:txBody>
       </p:sp>
@@ -4556,119 +5335,6 @@
 </file>
 
 <file path=ppt/slides/slide3.xml><?xml version="1.0" encoding="utf-8"?>
-<p:sld xmlns:a="http://schemas.openxmlformats.org/drawingml/2006/main" xmlns:r="http://schemas.openxmlformats.org/officeDocument/2006/relationships" xmlns:p="http://schemas.openxmlformats.org/presentationml/2006/main">
-  <p:cSld>
-    <p:spTree>
-      <p:nvGrpSpPr>
-        <p:cNvPr id="1" name=""/>
-        <p:cNvGrpSpPr/>
-        <p:nvPr/>
-      </p:nvGrpSpPr>
-      <p:grpSpPr>
-        <a:xfrm>
-          <a:off x="0" y="0"/>
-          <a:ext cx="0" cy="0"/>
-          <a:chOff x="0" y="0"/>
-          <a:chExt cx="0" cy="0"/>
-        </a:xfrm>
-      </p:grpSpPr>
-      <p:pic>
-        <p:nvPicPr>
-          <p:cNvPr id="7" name="Content Placeholder 19">
-            <a:extLst>
-              <a:ext uri="{FF2B5EF4-FFF2-40B4-BE49-F238E27FC236}">
-                <a16:creationId xmlns:a16="http://schemas.microsoft.com/office/drawing/2014/main" id="{2AF18702-CD6D-9E51-D415-B47C8271494B}"/>
-              </a:ext>
-            </a:extLst>
-          </p:cNvPr>
-          <p:cNvPicPr>
-            <a:picLocks noGrp="1" noChangeAspect="1"/>
-          </p:cNvPicPr>
-          <p:nvPr>
-            <p:ph sz="half" idx="1"/>
-          </p:nvPr>
-        </p:nvPicPr>
-        <p:blipFill>
-          <a:blip r:embed="rId2"/>
-          <a:stretch>
-            <a:fillRect/>
-          </a:stretch>
-        </p:blipFill>
-        <p:spPr>
-          <a:xfrm>
-            <a:off x="1143000" y="2629694"/>
-            <a:ext cx="4572000" cy="2743200"/>
-          </a:xfrm>
-        </p:spPr>
-      </p:pic>
-      <p:pic>
-        <p:nvPicPr>
-          <p:cNvPr id="8" name="Content Placeholder 10">
-            <a:extLst>
-              <a:ext uri="{FF2B5EF4-FFF2-40B4-BE49-F238E27FC236}">
-                <a16:creationId xmlns:a16="http://schemas.microsoft.com/office/drawing/2014/main" id="{79BE0189-60EE-454A-1EFC-A57371F78336}"/>
-              </a:ext>
-            </a:extLst>
-          </p:cNvPr>
-          <p:cNvPicPr>
-            <a:picLocks noGrp="1" noChangeAspect="1"/>
-          </p:cNvPicPr>
-          <p:nvPr>
-            <p:ph sz="half" idx="2"/>
-          </p:nvPr>
-        </p:nvPicPr>
-        <p:blipFill>
-          <a:blip r:embed="rId3"/>
-          <a:stretch>
-            <a:fillRect/>
-          </a:stretch>
-        </p:blipFill>
-        <p:spPr>
-          <a:xfrm>
-            <a:off x="6477000" y="2629694"/>
-            <a:ext cx="4572000" cy="2743200"/>
-          </a:xfrm>
-        </p:spPr>
-      </p:pic>
-      <p:sp>
-        <p:nvSpPr>
-          <p:cNvPr id="10" name="Title 9">
-            <a:extLst>
-              <a:ext uri="{FF2B5EF4-FFF2-40B4-BE49-F238E27FC236}">
-                <a16:creationId xmlns:a16="http://schemas.microsoft.com/office/drawing/2014/main" id="{480C3375-BCC5-F68D-588C-33BE175546F9}"/>
-              </a:ext>
-            </a:extLst>
-          </p:cNvPr>
-          <p:cNvSpPr>
-            <a:spLocks noGrp="1"/>
-          </p:cNvSpPr>
-          <p:nvPr>
-            <p:ph type="title"/>
-          </p:nvPr>
-        </p:nvSpPr>
-        <p:spPr/>
-        <p:txBody>
-          <a:bodyPr/>
-          <a:lstStyle/>
-          <a:p>
-            <a:endParaRPr lang="en-US"/>
-          </a:p>
-        </p:txBody>
-      </p:sp>
-    </p:spTree>
-    <p:extLst>
-      <p:ext uri="{BB962C8B-B14F-4D97-AF65-F5344CB8AC3E}">
-        <p14:creationId xmlns:p14="http://schemas.microsoft.com/office/powerpoint/2010/main" val="2422070801"/>
-      </p:ext>
-    </p:extLst>
-  </p:cSld>
-  <p:clrMapOvr>
-    <a:masterClrMapping/>
-  </p:clrMapOvr>
-</p:sld>
-</file>
-
-<file path=ppt/slides/slide4.xml><?xml version="1.0" encoding="utf-8"?>
 <p:sld xmlns:a="http://schemas.openxmlformats.org/drawingml/2006/main" xmlns:r="http://schemas.openxmlformats.org/officeDocument/2006/relationships" xmlns:p="http://schemas.openxmlformats.org/presentationml/2006/main">
   <p:cSld>
     <p:spTree>
@@ -4726,7 +5392,7 @@
 </p:sld>
 </file>
 
-<file path=ppt/slides/slide5.xml><?xml version="1.0" encoding="utf-8"?>
+<file path=ppt/slides/slide4.xml><?xml version="1.0" encoding="utf-8"?>
 <p:sld xmlns:a="http://schemas.openxmlformats.org/drawingml/2006/main" xmlns:r="http://schemas.openxmlformats.org/officeDocument/2006/relationships" xmlns:p="http://schemas.openxmlformats.org/presentationml/2006/main">
   <p:cSld>
     <p:spTree>
@@ -4749,668 +5415,6 @@
           <a:chExt cx="0" cy="0"/>
         </a:xfrm>
       </p:grpSpPr>
-      <p:graphicFrame>
-        <p:nvGraphicFramePr>
-          <p:cNvPr id="4" name="Content Placeholder 3">
-            <a:extLst>
-              <a:ext uri="{FF2B5EF4-FFF2-40B4-BE49-F238E27FC236}">
-                <a16:creationId xmlns:a16="http://schemas.microsoft.com/office/drawing/2014/main" id="{6B849C42-1619-548A-DD8D-11A9FB1AE07A}"/>
-              </a:ext>
-            </a:extLst>
-          </p:cNvPr>
-          <p:cNvGraphicFramePr>
-            <a:graphicFrameLocks noGrp="1"/>
-          </p:cNvGraphicFramePr>
-          <p:nvPr>
-            <p:ph idx="1"/>
-          </p:nvPr>
-        </p:nvGraphicFramePr>
-        <p:xfrm>
-          <a:off x="1208690" y="942340"/>
-          <a:ext cx="10720551" cy="4973320"/>
-        </p:xfrm>
-        <a:graphic>
-          <a:graphicData uri="http://schemas.openxmlformats.org/drawingml/2006/table">
-            <a:tbl>
-              <a:tblPr firstRow="1" bandRow="1">
-                <a:tableStyleId>{21E4AEA4-8DFA-4A89-87EB-49C32662AFE0}</a:tableStyleId>
-              </a:tblPr>
-              <a:tblGrid>
-                <a:gridCol w="1717110">
-                  <a:extLst>
-                    <a:ext uri="{9D8B030D-6E8A-4147-A177-3AD203B41FA5}">
-                      <a16:colId xmlns:a16="http://schemas.microsoft.com/office/drawing/2014/main" val="4182014441"/>
-                    </a:ext>
-                  </a:extLst>
-                </a:gridCol>
-                <a:gridCol w="5976462">
-                  <a:extLst>
-                    <a:ext uri="{9D8B030D-6E8A-4147-A177-3AD203B41FA5}">
-                      <a16:colId xmlns:a16="http://schemas.microsoft.com/office/drawing/2014/main" val="906180283"/>
-                    </a:ext>
-                  </a:extLst>
-                </a:gridCol>
-                <a:gridCol w="3026979">
-                  <a:extLst>
-                    <a:ext uri="{9D8B030D-6E8A-4147-A177-3AD203B41FA5}">
-                      <a16:colId xmlns:a16="http://schemas.microsoft.com/office/drawing/2014/main" val="2769721792"/>
-                    </a:ext>
-                  </a:extLst>
-                </a:gridCol>
-              </a:tblGrid>
-              <a:tr h="370840">
-                <a:tc>
-                  <a:txBody>
-                    <a:bodyPr/>
-                    <a:lstStyle/>
-                    <a:p>
-                      <a:r>
-                        <a:rPr lang="en-US" dirty="0"/>
-                        <a:t>Time</a:t>
-                      </a:r>
-                    </a:p>
-                  </a:txBody>
-                  <a:tcPr/>
-                </a:tc>
-                <a:tc>
-                  <a:txBody>
-                    <a:bodyPr/>
-                    <a:lstStyle/>
-                    <a:p>
-                      <a:r>
-                        <a:rPr lang="en-US" dirty="0"/>
-                        <a:t>Description</a:t>
-                      </a:r>
-                    </a:p>
-                  </a:txBody>
-                  <a:tcPr/>
-                </a:tc>
-                <a:tc>
-                  <a:txBody>
-                    <a:bodyPr/>
-                    <a:lstStyle/>
-                    <a:p>
-                      <a:r>
-                        <a:rPr lang="en-US" dirty="0"/>
-                        <a:t>Discussant</a:t>
-                      </a:r>
-                    </a:p>
-                  </a:txBody>
-                  <a:tcPr/>
-                </a:tc>
-                <a:extLst>
-                  <a:ext uri="{0D108BD9-81ED-4DB2-BD59-A6C34878D82A}">
-                    <a16:rowId xmlns:a16="http://schemas.microsoft.com/office/drawing/2014/main" val="1700444250"/>
-                  </a:ext>
-                </a:extLst>
-              </a:tr>
-              <a:tr h="370840">
-                <a:tc>
-                  <a:txBody>
-                    <a:bodyPr/>
-                    <a:lstStyle/>
-                    <a:p>
-                      <a:r>
-                        <a:rPr lang="en-US" dirty="0"/>
-                        <a:t>[15 min]</a:t>
-                      </a:r>
-                    </a:p>
-                  </a:txBody>
-                  <a:tcPr/>
-                </a:tc>
-                <a:tc>
-                  <a:txBody>
-                    <a:bodyPr/>
-                    <a:lstStyle/>
-                    <a:p>
-                      <a:r>
-                        <a:rPr lang="en-US" sz="1800" kern="1200" dirty="0">
-                          <a:solidFill>
-                            <a:schemeClr val="dk1"/>
-                          </a:solidFill>
-                          <a:effectLst/>
-                          <a:latin typeface="+mn-lt"/>
-                          <a:ea typeface="+mn-ea"/>
-                          <a:cs typeface="+mn-cs"/>
-                        </a:rPr>
-                        <a:t>(0) Introductions and administrivia </a:t>
-                      </a:r>
-                      <a:endParaRPr lang="en-US" dirty="0"/>
-                    </a:p>
-                  </a:txBody>
-                  <a:tcPr/>
-                </a:tc>
-                <a:tc>
-                  <a:txBody>
-                    <a:bodyPr/>
-                    <a:lstStyle/>
-                    <a:p>
-                      <a:r>
-                        <a:rPr lang="en-US" dirty="0" err="1"/>
-                        <a:t>Trikalinos</a:t>
-                      </a:r>
-                      <a:endParaRPr lang="en-US" dirty="0"/>
-                    </a:p>
-                  </a:txBody>
-                  <a:tcPr/>
-                </a:tc>
-                <a:extLst>
-                  <a:ext uri="{0D108BD9-81ED-4DB2-BD59-A6C34878D82A}">
-                    <a16:rowId xmlns:a16="http://schemas.microsoft.com/office/drawing/2014/main" val="2490995723"/>
-                  </a:ext>
-                </a:extLst>
-              </a:tr>
-              <a:tr h="370840">
-                <a:tc>
-                  <a:txBody>
-                    <a:bodyPr/>
-                    <a:lstStyle/>
-                    <a:p>
-                      <a:r>
-                        <a:rPr lang="en-US" dirty="0"/>
-                        <a:t>[25 min]</a:t>
-                      </a:r>
-                    </a:p>
-                  </a:txBody>
-                  <a:tcPr/>
-                </a:tc>
-                <a:tc>
-                  <a:txBody>
-                    <a:bodyPr/>
-                    <a:lstStyle/>
-                    <a:p>
-                      <a:r>
-                        <a:rPr lang="en-US" sz="1800" kern="1200" dirty="0">
-                          <a:solidFill>
-                            <a:schemeClr val="dk1"/>
-                          </a:solidFill>
-                          <a:effectLst/>
-                          <a:latin typeface="+mn-lt"/>
-                          <a:ea typeface="+mn-ea"/>
-                          <a:cs typeface="+mn-cs"/>
-                        </a:rPr>
-                        <a:t>(1) DES as a composition of point processes</a:t>
-                      </a:r>
-                    </a:p>
-                  </a:txBody>
-                  <a:tcPr/>
-                </a:tc>
-                <a:tc>
-                  <a:txBody>
-                    <a:bodyPr/>
-                    <a:lstStyle/>
-                    <a:p>
-                      <a:r>
-                        <a:rPr lang="en-US" dirty="0" err="1"/>
-                        <a:t>Alarid</a:t>
-                      </a:r>
-                      <a:r>
-                        <a:rPr lang="en-US" dirty="0"/>
-                        <a:t>-Escudero</a:t>
-                      </a:r>
-                    </a:p>
-                  </a:txBody>
-                  <a:tcPr/>
-                </a:tc>
-                <a:extLst>
-                  <a:ext uri="{0D108BD9-81ED-4DB2-BD59-A6C34878D82A}">
-                    <a16:rowId xmlns:a16="http://schemas.microsoft.com/office/drawing/2014/main" val="2065491183"/>
-                  </a:ext>
-                </a:extLst>
-              </a:tr>
-              <a:tr h="370840">
-                <a:tc>
-                  <a:txBody>
-                    <a:bodyPr/>
-                    <a:lstStyle/>
-                    <a:p>
-                      <a:r>
-                        <a:rPr lang="en-US" dirty="0"/>
-                        <a:t>[30 min]</a:t>
-                      </a:r>
-                    </a:p>
-                  </a:txBody>
-                  <a:tcPr/>
-                </a:tc>
-                <a:tc>
-                  <a:txBody>
-                    <a:bodyPr/>
-                    <a:lstStyle/>
-                    <a:p>
-                      <a:pPr marL="0" marR="0" lvl="0" indent="0" algn="l" defTabSz="914400" rtl="0" eaLnBrk="1" fontAlgn="auto" latinLnBrk="0" hangingPunct="1">
-                        <a:lnSpc>
-                          <a:spcPct val="100000"/>
-                        </a:lnSpc>
-                        <a:spcBef>
-                          <a:spcPts val="0"/>
-                        </a:spcBef>
-                        <a:spcAft>
-                          <a:spcPts val="0"/>
-                        </a:spcAft>
-                        <a:buClrTx/>
-                        <a:buSzTx/>
-                        <a:buFontTx/>
-                        <a:buNone/>
-                        <a:tabLst/>
-                        <a:defRPr/>
-                      </a:pPr>
-                      <a:r>
-                        <a:rPr lang="en-US" sz="1800" kern="1200" dirty="0">
-                          <a:solidFill>
-                            <a:schemeClr val="dk1"/>
-                          </a:solidFill>
-                          <a:effectLst/>
-                          <a:latin typeface="+mn-lt"/>
-                          <a:ea typeface="+mn-ea"/>
-                          <a:cs typeface="+mn-cs"/>
-                        </a:rPr>
-                        <a:t>(2) NHPPPs – key properties</a:t>
-                      </a:r>
-                    </a:p>
-                  </a:txBody>
-                  <a:tcPr/>
-                </a:tc>
-                <a:tc>
-                  <a:txBody>
-                    <a:bodyPr/>
-                    <a:lstStyle/>
-                    <a:p>
-                      <a:r>
-                        <a:rPr lang="en-US" dirty="0" err="1"/>
-                        <a:t>Trikalinos</a:t>
-                      </a:r>
-                      <a:endParaRPr lang="en-US" dirty="0"/>
-                    </a:p>
-                  </a:txBody>
-                  <a:tcPr/>
-                </a:tc>
-                <a:extLst>
-                  <a:ext uri="{0D108BD9-81ED-4DB2-BD59-A6C34878D82A}">
-                    <a16:rowId xmlns:a16="http://schemas.microsoft.com/office/drawing/2014/main" val="2757944147"/>
-                  </a:ext>
-                </a:extLst>
-              </a:tr>
-              <a:tr h="370840">
-                <a:tc>
-                  <a:txBody>
-                    <a:bodyPr/>
-                    <a:lstStyle/>
-                    <a:p>
-                      <a:r>
-                        <a:rPr lang="en-US" dirty="0"/>
-                        <a:t>[30 min]</a:t>
-                      </a:r>
-                    </a:p>
-                  </a:txBody>
-                  <a:tcPr/>
-                </a:tc>
-                <a:tc>
-                  <a:txBody>
-                    <a:bodyPr/>
-                    <a:lstStyle/>
-                    <a:p>
-                      <a:r>
-                        <a:rPr lang="en-US" sz="1800" kern="1200" dirty="0">
-                          <a:solidFill>
-                            <a:schemeClr val="dk1"/>
-                          </a:solidFill>
-                          <a:effectLst/>
-                          <a:latin typeface="+mn-lt"/>
-                          <a:ea typeface="+mn-ea"/>
-                          <a:cs typeface="+mn-cs"/>
-                        </a:rPr>
-                        <a:t>(3) Sampling from NHPPPs</a:t>
-                      </a:r>
-                      <a:endParaRPr lang="en-US" dirty="0"/>
-                    </a:p>
-                  </a:txBody>
-                  <a:tcPr/>
-                </a:tc>
-                <a:tc>
-                  <a:txBody>
-                    <a:bodyPr/>
-                    <a:lstStyle/>
-                    <a:p>
-                      <a:r>
-                        <a:rPr lang="en-US" dirty="0" err="1"/>
-                        <a:t>Sereda</a:t>
-                      </a:r>
-                      <a:endParaRPr lang="en-US" dirty="0"/>
-                    </a:p>
-                  </a:txBody>
-                  <a:tcPr/>
-                </a:tc>
-                <a:extLst>
-                  <a:ext uri="{0D108BD9-81ED-4DB2-BD59-A6C34878D82A}">
-                    <a16:rowId xmlns:a16="http://schemas.microsoft.com/office/drawing/2014/main" val="1442363784"/>
-                  </a:ext>
-                </a:extLst>
-              </a:tr>
-              <a:tr h="370840">
-                <a:tc>
-                  <a:txBody>
-                    <a:bodyPr/>
-                    <a:lstStyle/>
-                    <a:p>
-                      <a:r>
-                        <a:rPr lang="en-US" dirty="0"/>
-                        <a:t>[15 min]</a:t>
-                      </a:r>
-                    </a:p>
-                  </a:txBody>
-                  <a:tcPr/>
-                </a:tc>
-                <a:tc>
-                  <a:txBody>
-                    <a:bodyPr/>
-                    <a:lstStyle/>
-                    <a:p>
-                      <a:pPr marL="0" marR="0" lvl="0" indent="0" algn="l" defTabSz="914400" rtl="0" eaLnBrk="1" fontAlgn="auto" latinLnBrk="0" hangingPunct="1">
-                        <a:lnSpc>
-                          <a:spcPct val="100000"/>
-                        </a:lnSpc>
-                        <a:spcBef>
-                          <a:spcPts val="0"/>
-                        </a:spcBef>
-                        <a:spcAft>
-                          <a:spcPts val="0"/>
-                        </a:spcAft>
-                        <a:buClrTx/>
-                        <a:buSzTx/>
-                        <a:buFontTx/>
-                        <a:buNone/>
-                        <a:tabLst/>
-                        <a:defRPr/>
-                      </a:pPr>
-                      <a:r>
-                        <a:rPr lang="en-US" b="1" dirty="0"/>
-                        <a:t>Break</a:t>
-                      </a:r>
-                    </a:p>
-                  </a:txBody>
-                  <a:tcPr/>
-                </a:tc>
-                <a:tc>
-                  <a:txBody>
-                    <a:bodyPr/>
-                    <a:lstStyle/>
-                    <a:p>
-                      <a:endParaRPr lang="en-US" dirty="0"/>
-                    </a:p>
-                  </a:txBody>
-                  <a:tcPr/>
-                </a:tc>
-                <a:extLst>
-                  <a:ext uri="{0D108BD9-81ED-4DB2-BD59-A6C34878D82A}">
-                    <a16:rowId xmlns:a16="http://schemas.microsoft.com/office/drawing/2014/main" val="1269228105"/>
-                  </a:ext>
-                </a:extLst>
-              </a:tr>
-              <a:tr h="370840">
-                <a:tc>
-                  <a:txBody>
-                    <a:bodyPr/>
-                    <a:lstStyle/>
-                    <a:p>
-                      <a:r>
-                        <a:rPr lang="en-US" dirty="0"/>
-                        <a:t>[80 min]</a:t>
-                      </a:r>
-                    </a:p>
-                  </a:txBody>
-                  <a:tcPr/>
-                </a:tc>
-                <a:tc>
-                  <a:txBody>
-                    <a:bodyPr/>
-                    <a:lstStyle/>
-                    <a:p>
-                      <a:r>
-                        <a:rPr lang="en-US" sz="1800" kern="1200" dirty="0">
-                          <a:solidFill>
-                            <a:schemeClr val="dk1"/>
-                          </a:solidFill>
-                          <a:effectLst/>
-                          <a:latin typeface="+mn-lt"/>
-                          <a:ea typeface="+mn-ea"/>
-                          <a:cs typeface="+mn-cs"/>
-                        </a:rPr>
-                        <a:t>(4) Guided exercise: </a:t>
-                      </a:r>
-                    </a:p>
-                    <a:p>
-                      <a:pPr marL="285750" indent="-285750">
-                        <a:buFontTx/>
-                        <a:buChar char="-"/>
-                      </a:pPr>
-                      <a:r>
-                        <a:rPr lang="en-US" sz="1800" kern="1200" dirty="0">
-                          <a:solidFill>
-                            <a:schemeClr val="dk1"/>
-                          </a:solidFill>
-                          <a:effectLst/>
-                          <a:latin typeface="+mn-lt"/>
-                          <a:ea typeface="+mn-ea"/>
-                          <a:cs typeface="+mn-cs"/>
-                        </a:rPr>
-                        <a:t>Implement a simple cancer natural history DES for one person</a:t>
-                      </a:r>
-                    </a:p>
-                    <a:p>
-                      <a:pPr marL="285750" indent="-285750">
-                        <a:buFontTx/>
-                        <a:buChar char="-"/>
-                      </a:pPr>
-                      <a:r>
-                        <a:rPr lang="en-US" sz="1800" kern="1200" dirty="0">
-                          <a:solidFill>
-                            <a:schemeClr val="dk1"/>
-                          </a:solidFill>
-                          <a:effectLst/>
-                          <a:latin typeface="+mn-lt"/>
-                          <a:ea typeface="+mn-ea"/>
-                          <a:cs typeface="+mn-cs"/>
-                        </a:rPr>
-                        <a:t>The many-person case</a:t>
-                      </a:r>
-                    </a:p>
-                    <a:p>
-                      <a:pPr marL="285750" indent="-285750">
-                        <a:buFontTx/>
-                        <a:buChar char="-"/>
-                      </a:pPr>
-                      <a:r>
-                        <a:rPr lang="en-US" sz="1800" kern="1200" dirty="0">
-                          <a:solidFill>
-                            <a:schemeClr val="dk1"/>
-                          </a:solidFill>
-                          <a:effectLst/>
-                          <a:latin typeface="+mn-lt"/>
-                          <a:ea typeface="+mn-ea"/>
-                          <a:cs typeface="+mn-cs"/>
-                        </a:rPr>
-                        <a:t>Packaging </a:t>
-                      </a:r>
-                    </a:p>
-                  </a:txBody>
-                  <a:tcPr/>
-                </a:tc>
-                <a:tc>
-                  <a:txBody>
-                    <a:bodyPr/>
-                    <a:lstStyle/>
-                    <a:p>
-                      <a:r>
-                        <a:rPr lang="en-US" dirty="0"/>
-                        <a:t>[All]</a:t>
-                      </a:r>
-                    </a:p>
-                    <a:p>
-                      <a:r>
-                        <a:rPr lang="en-US" dirty="0" err="1"/>
-                        <a:t>Chrysanthopoulou</a:t>
-                      </a:r>
-                      <a:endParaRPr lang="en-US" dirty="0"/>
-                    </a:p>
-                    <a:p>
-                      <a:endParaRPr lang="en-US" dirty="0"/>
-                    </a:p>
-                    <a:p>
-                      <a:r>
-                        <a:rPr lang="en-US" dirty="0" err="1"/>
-                        <a:t>Sereda</a:t>
-                      </a:r>
-                      <a:r>
-                        <a:rPr lang="en-US" dirty="0"/>
-                        <a:t>/</a:t>
-                      </a:r>
-                      <a:r>
-                        <a:rPr lang="en-US" dirty="0" err="1"/>
-                        <a:t>Alarid</a:t>
-                      </a:r>
-                      <a:r>
-                        <a:rPr lang="en-US" dirty="0"/>
-                        <a:t>-Escudero</a:t>
-                      </a:r>
-                    </a:p>
-                    <a:p>
-                      <a:r>
-                        <a:rPr lang="en-US" dirty="0" err="1"/>
-                        <a:t>Trikalinos</a:t>
-                      </a:r>
-                      <a:endParaRPr lang="en-US" dirty="0"/>
-                    </a:p>
-                  </a:txBody>
-                  <a:tcPr/>
-                </a:tc>
-                <a:extLst>
-                  <a:ext uri="{0D108BD9-81ED-4DB2-BD59-A6C34878D82A}">
-                    <a16:rowId xmlns:a16="http://schemas.microsoft.com/office/drawing/2014/main" val="1448491104"/>
-                  </a:ext>
-                </a:extLst>
-              </a:tr>
-              <a:tr h="370840">
-                <a:tc>
-                  <a:txBody>
-                    <a:bodyPr/>
-                    <a:lstStyle/>
-                    <a:p>
-                      <a:r>
-                        <a:rPr lang="en-US" dirty="0"/>
-                        <a:t>[10 min]</a:t>
-                      </a:r>
-                    </a:p>
-                  </a:txBody>
-                  <a:tcPr/>
-                </a:tc>
-                <a:tc>
-                  <a:txBody>
-                    <a:bodyPr/>
-                    <a:lstStyle/>
-                    <a:p>
-                      <a:pPr marL="0" marR="0" lvl="0" indent="0" algn="l" defTabSz="914400" rtl="0" eaLnBrk="1" fontAlgn="auto" latinLnBrk="0" hangingPunct="1">
-                        <a:lnSpc>
-                          <a:spcPct val="100000"/>
-                        </a:lnSpc>
-                        <a:spcBef>
-                          <a:spcPts val="0"/>
-                        </a:spcBef>
-                        <a:spcAft>
-                          <a:spcPts val="0"/>
-                        </a:spcAft>
-                        <a:buClrTx/>
-                        <a:buSzTx/>
-                        <a:buFontTx/>
-                        <a:buNone/>
-                        <a:tabLst/>
-                        <a:defRPr/>
-                      </a:pPr>
-                      <a:r>
-                        <a:rPr lang="en-US" sz="1800" kern="1200" dirty="0">
-                          <a:solidFill>
-                            <a:schemeClr val="dk1"/>
-                          </a:solidFill>
-                          <a:effectLst/>
-                          <a:latin typeface="+mn-lt"/>
-                          <a:ea typeface="+mn-ea"/>
-                          <a:cs typeface="+mn-cs"/>
-                        </a:rPr>
-                        <a:t>(5) Advanced Topic Teaser on self-excitatory processes: point processes that are not NHPPPs and when you may need them</a:t>
-                      </a:r>
-                    </a:p>
-                  </a:txBody>
-                  <a:tcPr/>
-                </a:tc>
-                <a:tc>
-                  <a:txBody>
-                    <a:bodyPr/>
-                    <a:lstStyle/>
-                    <a:p>
-                      <a:r>
-                        <a:rPr lang="en-US" dirty="0" err="1"/>
-                        <a:t>Trikalinos</a:t>
-                      </a:r>
-                      <a:endParaRPr lang="en-US" dirty="0"/>
-                    </a:p>
-                  </a:txBody>
-                  <a:tcPr/>
-                </a:tc>
-                <a:extLst>
-                  <a:ext uri="{0D108BD9-81ED-4DB2-BD59-A6C34878D82A}">
-                    <a16:rowId xmlns:a16="http://schemas.microsoft.com/office/drawing/2014/main" val="3766472740"/>
-                  </a:ext>
-                </a:extLst>
-              </a:tr>
-              <a:tr h="370840">
-                <a:tc>
-                  <a:txBody>
-                    <a:bodyPr/>
-                    <a:lstStyle/>
-                    <a:p>
-                      <a:r>
-                        <a:rPr lang="en-US" dirty="0"/>
-                        <a:t>[15 min]</a:t>
-                      </a:r>
-                    </a:p>
-                  </a:txBody>
-                  <a:tcPr/>
-                </a:tc>
-                <a:tc>
-                  <a:txBody>
-                    <a:bodyPr/>
-                    <a:lstStyle/>
-                    <a:p>
-                      <a:r>
-                        <a:rPr lang="en-US" dirty="0"/>
-                        <a:t>General Q &amp; A</a:t>
-                      </a:r>
-                    </a:p>
-                  </a:txBody>
-                  <a:tcPr/>
-                </a:tc>
-                <a:tc>
-                  <a:txBody>
-                    <a:bodyPr/>
-                    <a:lstStyle/>
-                    <a:p>
-                      <a:r>
-                        <a:rPr lang="en-US" dirty="0"/>
-                        <a:t>All</a:t>
-                      </a:r>
-                    </a:p>
-                  </a:txBody>
-                  <a:tcPr/>
-                </a:tc>
-                <a:extLst>
-                  <a:ext uri="{0D108BD9-81ED-4DB2-BD59-A6C34878D82A}">
-                    <a16:rowId xmlns:a16="http://schemas.microsoft.com/office/drawing/2014/main" val="3034331301"/>
-                  </a:ext>
-                </a:extLst>
-              </a:tr>
-            </a:tbl>
-          </a:graphicData>
-        </a:graphic>
-      </p:graphicFrame>
       <p:sp>
         <p:nvSpPr>
           <p:cNvPr id="5" name="Right Arrow 4">
@@ -5425,7 +5429,7 @@
         </p:nvSpPr>
         <p:spPr>
           <a:xfrm>
-            <a:off x="189186" y="4611921"/>
+            <a:off x="189186" y="4335473"/>
             <a:ext cx="914400" cy="420414"/>
           </a:xfrm>
           <a:prstGeom prst="rightArrow">
@@ -5464,12 +5468,1437 @@
           </a:p>
         </p:txBody>
       </p:sp>
+      <mc:AlternateContent xmlns:mc="http://schemas.openxmlformats.org/markup-compatibility/2006" xmlns:a14="http://schemas.microsoft.com/office/drawing/2010/main">
+        <mc:Choice Requires="a14">
+          <p:graphicFrame>
+            <p:nvGraphicFramePr>
+              <p:cNvPr id="7" name="Content Placeholder 3">
+                <a:extLst>
+                  <a:ext uri="{FF2B5EF4-FFF2-40B4-BE49-F238E27FC236}">
+                    <a16:creationId xmlns:a16="http://schemas.microsoft.com/office/drawing/2014/main" id="{4C0C0FEA-AAB0-3713-274E-7C003203E9E8}"/>
+                  </a:ext>
+                </a:extLst>
+              </p:cNvPr>
+              <p:cNvGraphicFramePr>
+                <a:graphicFrameLocks/>
+              </p:cNvGraphicFramePr>
+              <p:nvPr>
+                <p:extLst>
+                  <p:ext uri="{D42A27DB-BD31-4B8C-83A1-F6EECF244321}">
+                    <p14:modId xmlns:p14="http://schemas.microsoft.com/office/powerpoint/2010/main" val="260976388"/>
+                  </p:ext>
+                </p:extLst>
+              </p:nvPr>
+            </p:nvGraphicFramePr>
+            <p:xfrm>
+              <a:off x="1208690" y="942340"/>
+              <a:ext cx="10720551" cy="4699000"/>
+            </p:xfrm>
+            <a:graphic>
+              <a:graphicData uri="http://schemas.openxmlformats.org/drawingml/2006/table">
+                <a:tbl>
+                  <a:tblPr firstRow="1" bandRow="1">
+                    <a:tableStyleId>{21E4AEA4-8DFA-4A89-87EB-49C32662AFE0}</a:tableStyleId>
+                  </a:tblPr>
+                  <a:tblGrid>
+                    <a:gridCol w="1717110">
+                      <a:extLst>
+                        <a:ext uri="{9D8B030D-6E8A-4147-A177-3AD203B41FA5}">
+                          <a16:colId xmlns:a16="http://schemas.microsoft.com/office/drawing/2014/main" val="4182014441"/>
+                        </a:ext>
+                      </a:extLst>
+                    </a:gridCol>
+                    <a:gridCol w="5976462">
+                      <a:extLst>
+                        <a:ext uri="{9D8B030D-6E8A-4147-A177-3AD203B41FA5}">
+                          <a16:colId xmlns:a16="http://schemas.microsoft.com/office/drawing/2014/main" val="906180283"/>
+                        </a:ext>
+                      </a:extLst>
+                    </a:gridCol>
+                    <a:gridCol w="3026979">
+                      <a:extLst>
+                        <a:ext uri="{9D8B030D-6E8A-4147-A177-3AD203B41FA5}">
+                          <a16:colId xmlns:a16="http://schemas.microsoft.com/office/drawing/2014/main" val="2769721792"/>
+                        </a:ext>
+                      </a:extLst>
+                    </a:gridCol>
+                  </a:tblGrid>
+                  <a:tr h="370840">
+                    <a:tc>
+                      <a:txBody>
+                        <a:bodyPr/>
+                        <a:lstStyle/>
+                        <a:p>
+                          <a:r>
+                            <a:rPr lang="en-US" dirty="0"/>
+                            <a:t>Time</a:t>
+                          </a:r>
+                        </a:p>
+                      </a:txBody>
+                      <a:tcPr/>
+                    </a:tc>
+                    <a:tc>
+                      <a:txBody>
+                        <a:bodyPr/>
+                        <a:lstStyle/>
+                        <a:p>
+                          <a:r>
+                            <a:rPr lang="en-US" dirty="0"/>
+                            <a:t>Description</a:t>
+                          </a:r>
+                        </a:p>
+                      </a:txBody>
+                      <a:tcPr/>
+                    </a:tc>
+                    <a:tc>
+                      <a:txBody>
+                        <a:bodyPr/>
+                        <a:lstStyle/>
+                        <a:p>
+                          <a:r>
+                            <a:rPr lang="en-US" dirty="0"/>
+                            <a:t>Discussant</a:t>
+                          </a:r>
+                        </a:p>
+                      </a:txBody>
+                      <a:tcPr/>
+                    </a:tc>
+                    <a:extLst>
+                      <a:ext uri="{0D108BD9-81ED-4DB2-BD59-A6C34878D82A}">
+                        <a16:rowId xmlns:a16="http://schemas.microsoft.com/office/drawing/2014/main" val="1700444250"/>
+                      </a:ext>
+                    </a:extLst>
+                  </a:tr>
+                  <a:tr h="370840">
+                    <a:tc>
+                      <a:txBody>
+                        <a:bodyPr/>
+                        <a:lstStyle/>
+                        <a:p>
+                          <a:r>
+                            <a:rPr lang="en-US" dirty="0"/>
+                            <a:t>[15 min]</a:t>
+                          </a:r>
+                        </a:p>
+                      </a:txBody>
+                      <a:tcPr/>
+                    </a:tc>
+                    <a:tc>
+                      <a:txBody>
+                        <a:bodyPr/>
+                        <a:lstStyle/>
+                        <a:p>
+                          <a:r>
+                            <a:rPr lang="en-US" sz="1800" kern="1200" dirty="0">
+                              <a:solidFill>
+                                <a:schemeClr val="dk1"/>
+                              </a:solidFill>
+                              <a:effectLst/>
+                              <a:latin typeface="+mn-lt"/>
+                              <a:ea typeface="+mn-ea"/>
+                              <a:cs typeface="+mn-cs"/>
+                            </a:rPr>
+                            <a:t>(0) Introductions and administrivia </a:t>
+                          </a:r>
+                          <a:endParaRPr lang="en-US" dirty="0"/>
+                        </a:p>
+                      </a:txBody>
+                      <a:tcPr/>
+                    </a:tc>
+                    <a:tc>
+                      <a:txBody>
+                        <a:bodyPr/>
+                        <a:lstStyle/>
+                        <a:p>
+                          <a:r>
+                            <a:rPr lang="en-US" dirty="0" err="1"/>
+                            <a:t>Trikalinos</a:t>
+                          </a:r>
+                          <a:endParaRPr lang="en-US" dirty="0"/>
+                        </a:p>
+                      </a:txBody>
+                      <a:tcPr/>
+                    </a:tc>
+                    <a:extLst>
+                      <a:ext uri="{0D108BD9-81ED-4DB2-BD59-A6C34878D82A}">
+                        <a16:rowId xmlns:a16="http://schemas.microsoft.com/office/drawing/2014/main" val="2490995723"/>
+                      </a:ext>
+                    </a:extLst>
+                  </a:tr>
+                  <a:tr h="370840">
+                    <a:tc>
+                      <a:txBody>
+                        <a:bodyPr/>
+                        <a:lstStyle/>
+                        <a:p>
+                          <a:r>
+                            <a:rPr lang="en-US" dirty="0"/>
+                            <a:t>[25 min]</a:t>
+                          </a:r>
+                        </a:p>
+                      </a:txBody>
+                      <a:tcPr/>
+                    </a:tc>
+                    <a:tc>
+                      <a:txBody>
+                        <a:bodyPr/>
+                        <a:lstStyle/>
+                        <a:p>
+                          <a:r>
+                            <a:rPr lang="en-US" sz="1800" kern="1200" dirty="0">
+                              <a:solidFill>
+                                <a:schemeClr val="dk1"/>
+                              </a:solidFill>
+                              <a:effectLst/>
+                              <a:latin typeface="+mn-lt"/>
+                              <a:ea typeface="+mn-ea"/>
+                              <a:cs typeface="+mn-cs"/>
+                            </a:rPr>
+                            <a:t>(1) DES as a composition of point processes</a:t>
+                          </a:r>
+                        </a:p>
+                      </a:txBody>
+                      <a:tcPr/>
+                    </a:tc>
+                    <a:tc>
+                      <a:txBody>
+                        <a:bodyPr/>
+                        <a:lstStyle/>
+                        <a:p>
+                          <a:r>
+                            <a:rPr lang="en-US" dirty="0" err="1"/>
+                            <a:t>Alarid</a:t>
+                          </a:r>
+                          <a:r>
+                            <a:rPr lang="en-US" dirty="0"/>
+                            <a:t>-Escudero</a:t>
+                          </a:r>
+                        </a:p>
+                      </a:txBody>
+                      <a:tcPr/>
+                    </a:tc>
+                    <a:extLst>
+                      <a:ext uri="{0D108BD9-81ED-4DB2-BD59-A6C34878D82A}">
+                        <a16:rowId xmlns:a16="http://schemas.microsoft.com/office/drawing/2014/main" val="2065491183"/>
+                      </a:ext>
+                    </a:extLst>
+                  </a:tr>
+                  <a:tr h="370840">
+                    <a:tc>
+                      <a:txBody>
+                        <a:bodyPr/>
+                        <a:lstStyle/>
+                        <a:p>
+                          <a:r>
+                            <a:rPr lang="en-US" dirty="0"/>
+                            <a:t>[30 min]</a:t>
+                          </a:r>
+                        </a:p>
+                      </a:txBody>
+                      <a:tcPr/>
+                    </a:tc>
+                    <a:tc>
+                      <a:txBody>
+                        <a:bodyPr/>
+                        <a:lstStyle/>
+                        <a:p>
+                          <a:pPr marL="0" marR="0" lvl="0" indent="0" algn="l" defTabSz="914400" rtl="0" eaLnBrk="1" fontAlgn="auto" latinLnBrk="0" hangingPunct="1">
+                            <a:lnSpc>
+                              <a:spcPct val="100000"/>
+                            </a:lnSpc>
+                            <a:spcBef>
+                              <a:spcPts val="0"/>
+                            </a:spcBef>
+                            <a:spcAft>
+                              <a:spcPts val="0"/>
+                            </a:spcAft>
+                            <a:buClrTx/>
+                            <a:buSzTx/>
+                            <a:buFontTx/>
+                            <a:buNone/>
+                            <a:tabLst/>
+                            <a:defRPr/>
+                          </a:pPr>
+                          <a:r>
+                            <a:rPr lang="en-US" sz="1800" kern="1200" dirty="0">
+                              <a:solidFill>
+                                <a:schemeClr val="dk1"/>
+                              </a:solidFill>
+                              <a:effectLst/>
+                              <a:latin typeface="+mn-lt"/>
+                              <a:ea typeface="+mn-ea"/>
+                              <a:cs typeface="+mn-cs"/>
+                            </a:rPr>
+                            <a:t>(2) NHPPPs – key properties</a:t>
+                          </a:r>
+                        </a:p>
+                      </a:txBody>
+                      <a:tcPr/>
+                    </a:tc>
+                    <a:tc>
+                      <a:txBody>
+                        <a:bodyPr/>
+                        <a:lstStyle/>
+                        <a:p>
+                          <a:r>
+                            <a:rPr lang="en-US" dirty="0" err="1"/>
+                            <a:t>Trikalinos</a:t>
+                          </a:r>
+                          <a:endParaRPr lang="en-US" dirty="0"/>
+                        </a:p>
+                      </a:txBody>
+                      <a:tcPr/>
+                    </a:tc>
+                    <a:extLst>
+                      <a:ext uri="{0D108BD9-81ED-4DB2-BD59-A6C34878D82A}">
+                        <a16:rowId xmlns:a16="http://schemas.microsoft.com/office/drawing/2014/main" val="2757944147"/>
+                      </a:ext>
+                    </a:extLst>
+                  </a:tr>
+                  <a:tr h="370840">
+                    <a:tc>
+                      <a:txBody>
+                        <a:bodyPr/>
+                        <a:lstStyle/>
+                        <a:p>
+                          <a:r>
+                            <a:rPr lang="en-US" dirty="0"/>
+                            <a:t>[30 min]</a:t>
+                          </a:r>
+                        </a:p>
+                      </a:txBody>
+                      <a:tcPr/>
+                    </a:tc>
+                    <a:tc>
+                      <a:txBody>
+                        <a:bodyPr/>
+                        <a:lstStyle/>
+                        <a:p>
+                          <a:r>
+                            <a:rPr lang="en-US" sz="1800" kern="1200" dirty="0">
+                              <a:solidFill>
+                                <a:schemeClr val="dk1"/>
+                              </a:solidFill>
+                              <a:effectLst/>
+                              <a:latin typeface="+mn-lt"/>
+                              <a:ea typeface="+mn-ea"/>
+                              <a:cs typeface="+mn-cs"/>
+                            </a:rPr>
+                            <a:t>(3) Sampling from NHPPPs</a:t>
+                          </a:r>
+                          <a:endParaRPr lang="en-US" dirty="0"/>
+                        </a:p>
+                      </a:txBody>
+                      <a:tcPr/>
+                    </a:tc>
+                    <a:tc>
+                      <a:txBody>
+                        <a:bodyPr/>
+                        <a:lstStyle/>
+                        <a:p>
+                          <a:pPr marL="0" marR="0" lvl="0" indent="0" algn="l" defTabSz="914400" rtl="0" eaLnBrk="1" fontAlgn="auto" latinLnBrk="0" hangingPunct="1">
+                            <a:lnSpc>
+                              <a:spcPct val="100000"/>
+                            </a:lnSpc>
+                            <a:spcBef>
+                              <a:spcPts val="0"/>
+                            </a:spcBef>
+                            <a:spcAft>
+                              <a:spcPts val="0"/>
+                            </a:spcAft>
+                            <a:buClrTx/>
+                            <a:buSzTx/>
+                            <a:buFontTx/>
+                            <a:buNone/>
+                            <a:tabLst/>
+                            <a:defRPr/>
+                          </a:pPr>
+                          <a:r>
+                            <a:rPr lang="en-US" dirty="0"/>
+                            <a:t>Trikalinos</a:t>
+                          </a:r>
+                        </a:p>
+                      </a:txBody>
+                      <a:tcPr/>
+                    </a:tc>
+                    <a:extLst>
+                      <a:ext uri="{0D108BD9-81ED-4DB2-BD59-A6C34878D82A}">
+                        <a16:rowId xmlns:a16="http://schemas.microsoft.com/office/drawing/2014/main" val="1442363784"/>
+                      </a:ext>
+                    </a:extLst>
+                  </a:tr>
+                  <a:tr h="370840">
+                    <a:tc>
+                      <a:txBody>
+                        <a:bodyPr/>
+                        <a:lstStyle/>
+                        <a:p>
+                          <a:r>
+                            <a:rPr lang="en-US" dirty="0"/>
+                            <a:t>[15 min]</a:t>
+                          </a:r>
+                        </a:p>
+                      </a:txBody>
+                      <a:tcPr/>
+                    </a:tc>
+                    <a:tc>
+                      <a:txBody>
+                        <a:bodyPr/>
+                        <a:lstStyle/>
+                        <a:p>
+                          <a:pPr marL="0" marR="0" lvl="0" indent="0" algn="l" defTabSz="914400" rtl="0" eaLnBrk="1" fontAlgn="auto" latinLnBrk="0" hangingPunct="1">
+                            <a:lnSpc>
+                              <a:spcPct val="100000"/>
+                            </a:lnSpc>
+                            <a:spcBef>
+                              <a:spcPts val="0"/>
+                            </a:spcBef>
+                            <a:spcAft>
+                              <a:spcPts val="0"/>
+                            </a:spcAft>
+                            <a:buClrTx/>
+                            <a:buSzTx/>
+                            <a:buFontTx/>
+                            <a:buNone/>
+                            <a:tabLst/>
+                            <a:defRPr/>
+                          </a:pPr>
+                          <a:r>
+                            <a:rPr lang="en-US" b="1" dirty="0"/>
+                            <a:t>Break</a:t>
+                          </a:r>
+                        </a:p>
+                      </a:txBody>
+                      <a:tcPr/>
+                    </a:tc>
+                    <a:tc>
+                      <a:txBody>
+                        <a:bodyPr/>
+                        <a:lstStyle/>
+                        <a:p>
+                          <a:endParaRPr lang="en-US" dirty="0"/>
+                        </a:p>
+                      </a:txBody>
+                      <a:tcPr/>
+                    </a:tc>
+                    <a:extLst>
+                      <a:ext uri="{0D108BD9-81ED-4DB2-BD59-A6C34878D82A}">
+                        <a16:rowId xmlns:a16="http://schemas.microsoft.com/office/drawing/2014/main" val="1269228105"/>
+                      </a:ext>
+                    </a:extLst>
+                  </a:tr>
+                  <a:tr h="370840">
+                    <a:tc>
+                      <a:txBody>
+                        <a:bodyPr/>
+                        <a:lstStyle/>
+                        <a:p>
+                          <a:r>
+                            <a:rPr lang="en-US" dirty="0"/>
+                            <a:t>[80 min]</a:t>
+                          </a:r>
+                        </a:p>
+                      </a:txBody>
+                      <a:tcPr/>
+                    </a:tc>
+                    <a:tc>
+                      <a:txBody>
+                        <a:bodyPr/>
+                        <a:lstStyle/>
+                        <a:p>
+                          <a:r>
+                            <a:rPr lang="en-US" sz="1800" kern="1200" dirty="0">
+                              <a:solidFill>
+                                <a:schemeClr val="dk1"/>
+                              </a:solidFill>
+                              <a:effectLst/>
+                              <a:latin typeface="+mn-lt"/>
+                              <a:ea typeface="+mn-ea"/>
+                              <a:cs typeface="+mn-cs"/>
+                            </a:rPr>
+                            <a:t>(4) Working with code</a:t>
+                          </a:r>
+                        </a:p>
+                        <a:p>
+                          <a:r>
+                            <a:rPr lang="en-US" sz="1800" kern="1200" dirty="0">
+                              <a:solidFill>
+                                <a:schemeClr val="dk1"/>
+                              </a:solidFill>
+                              <a:effectLst/>
+                              <a:latin typeface="+mn-lt"/>
+                              <a:ea typeface="+mn-ea"/>
+                              <a:cs typeface="+mn-cs"/>
+                            </a:rPr>
+                            <a:t>-- Base </a:t>
+                          </a:r>
+                          <a:r>
+                            <a:rPr lang="en-US" sz="1800" kern="1200" dirty="0">
+                              <a:solidFill>
+                                <a:schemeClr val="dk1"/>
+                              </a:solidFill>
+                              <a:effectLst/>
+                              <a:latin typeface="Courier New" panose="02070309020205020404" pitchFamily="49" charset="0"/>
+                              <a:ea typeface="+mn-ea"/>
+                              <a:cs typeface="Courier New" panose="02070309020205020404" pitchFamily="49" charset="0"/>
+                            </a:rPr>
+                            <a:t>R</a:t>
+                          </a:r>
+                          <a:r>
+                            <a:rPr lang="en-US" sz="1800" kern="1200" dirty="0">
+                              <a:solidFill>
+                                <a:schemeClr val="dk1"/>
+                              </a:solidFill>
+                              <a:effectLst/>
+                              <a:latin typeface="+mn-lt"/>
+                              <a:ea typeface="+mn-ea"/>
+                              <a:cs typeface="+mn-cs"/>
+                            </a:rPr>
+                            <a:t> vs </a:t>
+                          </a:r>
+                          <a:r>
+                            <a:rPr lang="en-US" sz="1800" kern="1200" dirty="0" err="1">
+                              <a:solidFill>
+                                <a:schemeClr val="dk1"/>
+                              </a:solidFill>
+                              <a:effectLst/>
+                              <a:latin typeface="Courier New" panose="02070309020205020404" pitchFamily="49" charset="0"/>
+                              <a:ea typeface="+mn-ea"/>
+                              <a:cs typeface="Courier New" panose="02070309020205020404" pitchFamily="49" charset="0"/>
+                            </a:rPr>
+                            <a:t>nhppp</a:t>
+                          </a:r>
+                          <a:r>
+                            <a:rPr lang="en-US" sz="1800" kern="1200" dirty="0">
+                              <a:solidFill>
+                                <a:schemeClr val="dk1"/>
+                              </a:solidFill>
+                              <a:effectLst/>
+                              <a:latin typeface="+mn-lt"/>
+                              <a:ea typeface="+mn-ea"/>
+                              <a:cs typeface="+mn-cs"/>
+                            </a:rPr>
+                            <a:t>:  Simulate first vs all events in </a:t>
+                          </a:r>
+                          <a14:m>
+                            <m:oMath xmlns:m="http://schemas.openxmlformats.org/officeDocument/2006/math">
+                              <m:r>
+                                <a:rPr lang="en-US" sz="1800" b="0" i="1" kern="1200" smtClean="0">
+                                  <a:solidFill>
+                                    <a:schemeClr val="dk1"/>
+                                  </a:solidFill>
+                                  <a:effectLst/>
+                                  <a:latin typeface="Cambria Math" panose="02040503050406030204" pitchFamily="18" charset="0"/>
+                                  <a:ea typeface="+mn-ea"/>
+                                  <a:cs typeface="+mn-cs"/>
+                                </a:rPr>
+                                <m:t>(</m:t>
+                              </m:r>
+                              <m:r>
+                                <m:rPr>
+                                  <m:sty m:val="p"/>
+                                </m:rPr>
+                                <a:rPr lang="en-US" sz="1800" b="0" i="1" kern="1200" smtClean="0">
+                                  <a:solidFill>
+                                    <a:schemeClr val="dk1"/>
+                                  </a:solidFill>
+                                  <a:effectLst/>
+                                  <a:latin typeface="Cambria Math" panose="02040503050406030204" pitchFamily="18" charset="0"/>
+                                  <a:ea typeface="+mn-ea"/>
+                                  <a:cs typeface="+mn-cs"/>
+                                </a:rPr>
+                                <m:t>a</m:t>
+                              </m:r>
+                              <m:r>
+                                <a:rPr lang="en-US" sz="1800" b="0" i="1" kern="1200" smtClean="0">
+                                  <a:solidFill>
+                                    <a:schemeClr val="dk1"/>
+                                  </a:solidFill>
+                                  <a:effectLst/>
+                                  <a:latin typeface="Cambria Math" panose="02040503050406030204" pitchFamily="18" charset="0"/>
+                                  <a:ea typeface="+mn-ea"/>
+                                  <a:cs typeface="+mn-cs"/>
+                                </a:rPr>
+                                <m:t>,</m:t>
+                              </m:r>
+                              <m:r>
+                                <m:rPr>
+                                  <m:sty m:val="p"/>
+                                </m:rPr>
+                                <a:rPr lang="en-US" sz="1800" b="0" i="1" kern="1200" smtClean="0">
+                                  <a:solidFill>
+                                    <a:schemeClr val="dk1"/>
+                                  </a:solidFill>
+                                  <a:effectLst/>
+                                  <a:latin typeface="Cambria Math" panose="02040503050406030204" pitchFamily="18" charset="0"/>
+                                  <a:ea typeface="+mn-ea"/>
+                                  <a:cs typeface="+mn-cs"/>
+                                </a:rPr>
+                                <m:t>b</m:t>
+                              </m:r>
+                              <m:r>
+                                <a:rPr lang="en-US" sz="1800" b="0" i="1" kern="1200" smtClean="0">
+                                  <a:solidFill>
+                                    <a:schemeClr val="dk1"/>
+                                  </a:solidFill>
+                                  <a:effectLst/>
+                                  <a:latin typeface="Cambria Math" panose="02040503050406030204" pitchFamily="18" charset="0"/>
+                                  <a:ea typeface="+mn-ea"/>
+                                  <a:cs typeface="+mn-cs"/>
+                                </a:rPr>
+                                <m:t>]</m:t>
+                              </m:r>
+                            </m:oMath>
+                          </a14:m>
+                          <a:endParaRPr lang="en-US" sz="1800" kern="1200" dirty="0">
+                            <a:solidFill>
+                              <a:schemeClr val="dk1"/>
+                            </a:solidFill>
+                            <a:effectLst/>
+                            <a:latin typeface="+mn-lt"/>
+                            <a:ea typeface="+mn-ea"/>
+                            <a:cs typeface="+mn-cs"/>
+                          </a:endParaRPr>
+                        </a:p>
+                        <a:p>
+                          <a:r>
+                            <a:rPr lang="en-US" sz="1800" kern="1200" dirty="0">
+                              <a:solidFill>
+                                <a:schemeClr val="dk1"/>
+                              </a:solidFill>
+                              <a:effectLst/>
+                              <a:latin typeface="+mn-lt"/>
+                              <a:ea typeface="+mn-ea"/>
+                              <a:cs typeface="+mn-cs"/>
+                            </a:rPr>
+                            <a:t>-- Packaging a simple cancer DES </a:t>
+                          </a:r>
+                        </a:p>
+                        <a:p>
+                          <a:r>
+                            <a:rPr lang="en-US" sz="1800" kern="1200" dirty="0">
+                              <a:solidFill>
+                                <a:schemeClr val="dk1"/>
+                              </a:solidFill>
+                              <a:effectLst/>
+                              <a:latin typeface="+mn-lt"/>
+                              <a:ea typeface="+mn-ea"/>
+                              <a:cs typeface="+mn-cs"/>
+                            </a:rPr>
+                            <a:t>-- The vectorized case </a:t>
+                          </a:r>
+                        </a:p>
+                      </a:txBody>
+                      <a:tcPr/>
+                    </a:tc>
+                    <a:tc>
+                      <a:txBody>
+                        <a:bodyPr/>
+                        <a:lstStyle/>
+                        <a:p>
+                          <a:r>
+                            <a:rPr lang="en-US" dirty="0"/>
+                            <a:t>[All]</a:t>
+                          </a:r>
+                        </a:p>
+                        <a:p>
+                          <a:r>
+                            <a:rPr lang="en-US" dirty="0"/>
+                            <a:t>Trikalinos</a:t>
+                          </a:r>
+                        </a:p>
+                        <a:p>
+                          <a:r>
+                            <a:rPr lang="en-US" dirty="0"/>
+                            <a:t>Sereda</a:t>
+                          </a:r>
+                        </a:p>
+                        <a:p>
+                          <a:pPr marL="0" marR="0" lvl="0" indent="0" algn="l" defTabSz="914400" rtl="0" eaLnBrk="1" fontAlgn="auto" latinLnBrk="0" hangingPunct="1">
+                            <a:lnSpc>
+                              <a:spcPct val="100000"/>
+                            </a:lnSpc>
+                            <a:spcBef>
+                              <a:spcPts val="0"/>
+                            </a:spcBef>
+                            <a:spcAft>
+                              <a:spcPts val="0"/>
+                            </a:spcAft>
+                            <a:buClrTx/>
+                            <a:buSzTx/>
+                            <a:buFontTx/>
+                            <a:buNone/>
+                            <a:tabLst/>
+                            <a:defRPr/>
+                          </a:pPr>
+                          <a:r>
+                            <a:rPr lang="en-US" dirty="0"/>
+                            <a:t>Sereda</a:t>
+                          </a:r>
+                        </a:p>
+                      </a:txBody>
+                      <a:tcPr/>
+                    </a:tc>
+                    <a:extLst>
+                      <a:ext uri="{0D108BD9-81ED-4DB2-BD59-A6C34878D82A}">
+                        <a16:rowId xmlns:a16="http://schemas.microsoft.com/office/drawing/2014/main" val="1448491104"/>
+                      </a:ext>
+                    </a:extLst>
+                  </a:tr>
+                  <a:tr h="370840">
+                    <a:tc>
+                      <a:txBody>
+                        <a:bodyPr/>
+                        <a:lstStyle/>
+                        <a:p>
+                          <a:r>
+                            <a:rPr lang="en-US" dirty="0"/>
+                            <a:t>[5 min]</a:t>
+                          </a:r>
+                        </a:p>
+                      </a:txBody>
+                      <a:tcPr/>
+                    </a:tc>
+                    <a:tc>
+                      <a:txBody>
+                        <a:bodyPr/>
+                        <a:lstStyle/>
+                        <a:p>
+                          <a:pPr marL="0" marR="0" lvl="0" indent="0" algn="l" defTabSz="914400" rtl="0" eaLnBrk="1" fontAlgn="auto" latinLnBrk="0" hangingPunct="1">
+                            <a:lnSpc>
+                              <a:spcPct val="100000"/>
+                            </a:lnSpc>
+                            <a:spcBef>
+                              <a:spcPts val="0"/>
+                            </a:spcBef>
+                            <a:spcAft>
+                              <a:spcPts val="0"/>
+                            </a:spcAft>
+                            <a:buClrTx/>
+                            <a:buSzTx/>
+                            <a:buFontTx/>
+                            <a:buNone/>
+                            <a:tabLst/>
+                            <a:defRPr/>
+                          </a:pPr>
+                          <a:r>
+                            <a:rPr lang="en-US" sz="1800" kern="1200" dirty="0">
+                              <a:solidFill>
+                                <a:schemeClr val="dk1"/>
+                              </a:solidFill>
+                              <a:effectLst/>
+                              <a:latin typeface="+mn-lt"/>
+                              <a:ea typeface="+mn-ea"/>
+                              <a:cs typeface="+mn-cs"/>
+                            </a:rPr>
+                            <a:t>(5) Advanced Topic Teaser on self-excitatory processes: point processes that are not NHPPPs and when you may need them</a:t>
+                          </a:r>
+                        </a:p>
+                      </a:txBody>
+                      <a:tcPr/>
+                    </a:tc>
+                    <a:tc>
+                      <a:txBody>
+                        <a:bodyPr/>
+                        <a:lstStyle/>
+                        <a:p>
+                          <a:r>
+                            <a:rPr lang="en-US" dirty="0"/>
+                            <a:t>Trikalinos</a:t>
+                          </a:r>
+                        </a:p>
+                      </a:txBody>
+                      <a:tcPr/>
+                    </a:tc>
+                    <a:extLst>
+                      <a:ext uri="{0D108BD9-81ED-4DB2-BD59-A6C34878D82A}">
+                        <a16:rowId xmlns:a16="http://schemas.microsoft.com/office/drawing/2014/main" val="3766472740"/>
+                      </a:ext>
+                    </a:extLst>
+                  </a:tr>
+                  <a:tr h="370840">
+                    <a:tc>
+                      <a:txBody>
+                        <a:bodyPr/>
+                        <a:lstStyle/>
+                        <a:p>
+                          <a:r>
+                            <a:rPr lang="en-US" dirty="0"/>
+                            <a:t>[15 min]</a:t>
+                          </a:r>
+                        </a:p>
+                      </a:txBody>
+                      <a:tcPr/>
+                    </a:tc>
+                    <a:tc>
+                      <a:txBody>
+                        <a:bodyPr/>
+                        <a:lstStyle/>
+                        <a:p>
+                          <a:r>
+                            <a:rPr lang="en-US" dirty="0"/>
+                            <a:t>General Q &amp; A</a:t>
+                          </a:r>
+                        </a:p>
+                      </a:txBody>
+                      <a:tcPr/>
+                    </a:tc>
+                    <a:tc>
+                      <a:txBody>
+                        <a:bodyPr/>
+                        <a:lstStyle/>
+                        <a:p>
+                          <a:r>
+                            <a:rPr lang="en-US" dirty="0"/>
+                            <a:t>All</a:t>
+                          </a:r>
+                        </a:p>
+                      </a:txBody>
+                      <a:tcPr/>
+                    </a:tc>
+                    <a:extLst>
+                      <a:ext uri="{0D108BD9-81ED-4DB2-BD59-A6C34878D82A}">
+                        <a16:rowId xmlns:a16="http://schemas.microsoft.com/office/drawing/2014/main" val="3034331301"/>
+                      </a:ext>
+                    </a:extLst>
+                  </a:tr>
+                </a:tbl>
+              </a:graphicData>
+            </a:graphic>
+          </p:graphicFrame>
+        </mc:Choice>
+        <mc:Fallback xmlns="">
+          <p:graphicFrame>
+            <p:nvGraphicFramePr>
+              <p:cNvPr id="7" name="Content Placeholder 3">
+                <a:extLst>
+                  <a:ext uri="{FF2B5EF4-FFF2-40B4-BE49-F238E27FC236}">
+                    <a16:creationId xmlns:a16="http://schemas.microsoft.com/office/drawing/2014/main" id="{4C0C0FEA-AAB0-3713-274E-7C003203E9E8}"/>
+                  </a:ext>
+                </a:extLst>
+              </p:cNvPr>
+              <p:cNvGraphicFramePr>
+                <a:graphicFrameLocks/>
+              </p:cNvGraphicFramePr>
+              <p:nvPr>
+                <p:extLst>
+                  <p:ext uri="{D42A27DB-BD31-4B8C-83A1-F6EECF244321}">
+                    <p14:modId xmlns:p14="http://schemas.microsoft.com/office/powerpoint/2010/main" val="260976388"/>
+                  </p:ext>
+                </p:extLst>
+              </p:nvPr>
+            </p:nvGraphicFramePr>
+            <p:xfrm>
+              <a:off x="1208690" y="942340"/>
+              <a:ext cx="10720551" cy="4699000"/>
+            </p:xfrm>
+            <a:graphic>
+              <a:graphicData uri="http://schemas.openxmlformats.org/drawingml/2006/table">
+                <a:tbl>
+                  <a:tblPr firstRow="1" bandRow="1">
+                    <a:tableStyleId>{21E4AEA4-8DFA-4A89-87EB-49C32662AFE0}</a:tableStyleId>
+                  </a:tblPr>
+                  <a:tblGrid>
+                    <a:gridCol w="1717110">
+                      <a:extLst>
+                        <a:ext uri="{9D8B030D-6E8A-4147-A177-3AD203B41FA5}">
+                          <a16:colId xmlns:a16="http://schemas.microsoft.com/office/drawing/2014/main" val="4182014441"/>
+                        </a:ext>
+                      </a:extLst>
+                    </a:gridCol>
+                    <a:gridCol w="5976462">
+                      <a:extLst>
+                        <a:ext uri="{9D8B030D-6E8A-4147-A177-3AD203B41FA5}">
+                          <a16:colId xmlns:a16="http://schemas.microsoft.com/office/drawing/2014/main" val="906180283"/>
+                        </a:ext>
+                      </a:extLst>
+                    </a:gridCol>
+                    <a:gridCol w="3026979">
+                      <a:extLst>
+                        <a:ext uri="{9D8B030D-6E8A-4147-A177-3AD203B41FA5}">
+                          <a16:colId xmlns:a16="http://schemas.microsoft.com/office/drawing/2014/main" val="2769721792"/>
+                        </a:ext>
+                      </a:extLst>
+                    </a:gridCol>
+                  </a:tblGrid>
+                  <a:tr h="370840">
+                    <a:tc>
+                      <a:txBody>
+                        <a:bodyPr/>
+                        <a:lstStyle/>
+                        <a:p>
+                          <a:r>
+                            <a:rPr lang="en-US" dirty="0"/>
+                            <a:t>Time</a:t>
+                          </a:r>
+                        </a:p>
+                      </a:txBody>
+                      <a:tcPr/>
+                    </a:tc>
+                    <a:tc>
+                      <a:txBody>
+                        <a:bodyPr/>
+                        <a:lstStyle/>
+                        <a:p>
+                          <a:r>
+                            <a:rPr lang="en-US" dirty="0"/>
+                            <a:t>Description</a:t>
+                          </a:r>
+                        </a:p>
+                      </a:txBody>
+                      <a:tcPr/>
+                    </a:tc>
+                    <a:tc>
+                      <a:txBody>
+                        <a:bodyPr/>
+                        <a:lstStyle/>
+                        <a:p>
+                          <a:r>
+                            <a:rPr lang="en-US" dirty="0"/>
+                            <a:t>Discussant</a:t>
+                          </a:r>
+                        </a:p>
+                      </a:txBody>
+                      <a:tcPr/>
+                    </a:tc>
+                    <a:extLst>
+                      <a:ext uri="{0D108BD9-81ED-4DB2-BD59-A6C34878D82A}">
+                        <a16:rowId xmlns:a16="http://schemas.microsoft.com/office/drawing/2014/main" val="1700444250"/>
+                      </a:ext>
+                    </a:extLst>
+                  </a:tr>
+                  <a:tr h="370840">
+                    <a:tc>
+                      <a:txBody>
+                        <a:bodyPr/>
+                        <a:lstStyle/>
+                        <a:p>
+                          <a:r>
+                            <a:rPr lang="en-US" dirty="0"/>
+                            <a:t>[15 min]</a:t>
+                          </a:r>
+                        </a:p>
+                      </a:txBody>
+                      <a:tcPr/>
+                    </a:tc>
+                    <a:tc>
+                      <a:txBody>
+                        <a:bodyPr/>
+                        <a:lstStyle/>
+                        <a:p>
+                          <a:r>
+                            <a:rPr lang="en-US" sz="1800" kern="1200" dirty="0">
+                              <a:solidFill>
+                                <a:schemeClr val="dk1"/>
+                              </a:solidFill>
+                              <a:effectLst/>
+                              <a:latin typeface="+mn-lt"/>
+                              <a:ea typeface="+mn-ea"/>
+                              <a:cs typeface="+mn-cs"/>
+                            </a:rPr>
+                            <a:t>(0) Introductions and administrivia </a:t>
+                          </a:r>
+                          <a:endParaRPr lang="en-US" dirty="0"/>
+                        </a:p>
+                      </a:txBody>
+                      <a:tcPr/>
+                    </a:tc>
+                    <a:tc>
+                      <a:txBody>
+                        <a:bodyPr/>
+                        <a:lstStyle/>
+                        <a:p>
+                          <a:r>
+                            <a:rPr lang="en-US" dirty="0" err="1"/>
+                            <a:t>Trikalinos</a:t>
+                          </a:r>
+                          <a:endParaRPr lang="en-US" dirty="0"/>
+                        </a:p>
+                      </a:txBody>
+                      <a:tcPr/>
+                    </a:tc>
+                    <a:extLst>
+                      <a:ext uri="{0D108BD9-81ED-4DB2-BD59-A6C34878D82A}">
+                        <a16:rowId xmlns:a16="http://schemas.microsoft.com/office/drawing/2014/main" val="2490995723"/>
+                      </a:ext>
+                    </a:extLst>
+                  </a:tr>
+                  <a:tr h="370840">
+                    <a:tc>
+                      <a:txBody>
+                        <a:bodyPr/>
+                        <a:lstStyle/>
+                        <a:p>
+                          <a:r>
+                            <a:rPr lang="en-US" dirty="0"/>
+                            <a:t>[25 min]</a:t>
+                          </a:r>
+                        </a:p>
+                      </a:txBody>
+                      <a:tcPr/>
+                    </a:tc>
+                    <a:tc>
+                      <a:txBody>
+                        <a:bodyPr/>
+                        <a:lstStyle/>
+                        <a:p>
+                          <a:r>
+                            <a:rPr lang="en-US" sz="1800" kern="1200" dirty="0">
+                              <a:solidFill>
+                                <a:schemeClr val="dk1"/>
+                              </a:solidFill>
+                              <a:effectLst/>
+                              <a:latin typeface="+mn-lt"/>
+                              <a:ea typeface="+mn-ea"/>
+                              <a:cs typeface="+mn-cs"/>
+                            </a:rPr>
+                            <a:t>(1) DES as a composition of point processes</a:t>
+                          </a:r>
+                        </a:p>
+                      </a:txBody>
+                      <a:tcPr/>
+                    </a:tc>
+                    <a:tc>
+                      <a:txBody>
+                        <a:bodyPr/>
+                        <a:lstStyle/>
+                        <a:p>
+                          <a:r>
+                            <a:rPr lang="en-US" dirty="0" err="1"/>
+                            <a:t>Alarid</a:t>
+                          </a:r>
+                          <a:r>
+                            <a:rPr lang="en-US" dirty="0"/>
+                            <a:t>-Escudero</a:t>
+                          </a:r>
+                        </a:p>
+                      </a:txBody>
+                      <a:tcPr/>
+                    </a:tc>
+                    <a:extLst>
+                      <a:ext uri="{0D108BD9-81ED-4DB2-BD59-A6C34878D82A}">
+                        <a16:rowId xmlns:a16="http://schemas.microsoft.com/office/drawing/2014/main" val="2065491183"/>
+                      </a:ext>
+                    </a:extLst>
+                  </a:tr>
+                  <a:tr h="370840">
+                    <a:tc>
+                      <a:txBody>
+                        <a:bodyPr/>
+                        <a:lstStyle/>
+                        <a:p>
+                          <a:r>
+                            <a:rPr lang="en-US" dirty="0"/>
+                            <a:t>[30 min]</a:t>
+                          </a:r>
+                        </a:p>
+                      </a:txBody>
+                      <a:tcPr/>
+                    </a:tc>
+                    <a:tc>
+                      <a:txBody>
+                        <a:bodyPr/>
+                        <a:lstStyle/>
+                        <a:p>
+                          <a:pPr marL="0" marR="0" lvl="0" indent="0" algn="l" defTabSz="914400" rtl="0" eaLnBrk="1" fontAlgn="auto" latinLnBrk="0" hangingPunct="1">
+                            <a:lnSpc>
+                              <a:spcPct val="100000"/>
+                            </a:lnSpc>
+                            <a:spcBef>
+                              <a:spcPts val="0"/>
+                            </a:spcBef>
+                            <a:spcAft>
+                              <a:spcPts val="0"/>
+                            </a:spcAft>
+                            <a:buClrTx/>
+                            <a:buSzTx/>
+                            <a:buFontTx/>
+                            <a:buNone/>
+                            <a:tabLst/>
+                            <a:defRPr/>
+                          </a:pPr>
+                          <a:r>
+                            <a:rPr lang="en-US" sz="1800" kern="1200" dirty="0">
+                              <a:solidFill>
+                                <a:schemeClr val="dk1"/>
+                              </a:solidFill>
+                              <a:effectLst/>
+                              <a:latin typeface="+mn-lt"/>
+                              <a:ea typeface="+mn-ea"/>
+                              <a:cs typeface="+mn-cs"/>
+                            </a:rPr>
+                            <a:t>(2) NHPPPs – key properties</a:t>
+                          </a:r>
+                        </a:p>
+                      </a:txBody>
+                      <a:tcPr/>
+                    </a:tc>
+                    <a:tc>
+                      <a:txBody>
+                        <a:bodyPr/>
+                        <a:lstStyle/>
+                        <a:p>
+                          <a:r>
+                            <a:rPr lang="en-US" dirty="0" err="1"/>
+                            <a:t>Trikalinos</a:t>
+                          </a:r>
+                          <a:endParaRPr lang="en-US" dirty="0"/>
+                        </a:p>
+                      </a:txBody>
+                      <a:tcPr/>
+                    </a:tc>
+                    <a:extLst>
+                      <a:ext uri="{0D108BD9-81ED-4DB2-BD59-A6C34878D82A}">
+                        <a16:rowId xmlns:a16="http://schemas.microsoft.com/office/drawing/2014/main" val="2757944147"/>
+                      </a:ext>
+                    </a:extLst>
+                  </a:tr>
+                  <a:tr h="370840">
+                    <a:tc>
+                      <a:txBody>
+                        <a:bodyPr/>
+                        <a:lstStyle/>
+                        <a:p>
+                          <a:r>
+                            <a:rPr lang="en-US" dirty="0"/>
+                            <a:t>[30 min]</a:t>
+                          </a:r>
+                        </a:p>
+                      </a:txBody>
+                      <a:tcPr/>
+                    </a:tc>
+                    <a:tc>
+                      <a:txBody>
+                        <a:bodyPr/>
+                        <a:lstStyle/>
+                        <a:p>
+                          <a:r>
+                            <a:rPr lang="en-US" sz="1800" kern="1200" dirty="0">
+                              <a:solidFill>
+                                <a:schemeClr val="dk1"/>
+                              </a:solidFill>
+                              <a:effectLst/>
+                              <a:latin typeface="+mn-lt"/>
+                              <a:ea typeface="+mn-ea"/>
+                              <a:cs typeface="+mn-cs"/>
+                            </a:rPr>
+                            <a:t>(3) Sampling from NHPPPs</a:t>
+                          </a:r>
+                          <a:endParaRPr lang="en-US" dirty="0"/>
+                        </a:p>
+                      </a:txBody>
+                      <a:tcPr/>
+                    </a:tc>
+                    <a:tc>
+                      <a:txBody>
+                        <a:bodyPr/>
+                        <a:lstStyle/>
+                        <a:p>
+                          <a:pPr marL="0" marR="0" lvl="0" indent="0" algn="l" defTabSz="914400" rtl="0" eaLnBrk="1" fontAlgn="auto" latinLnBrk="0" hangingPunct="1">
+                            <a:lnSpc>
+                              <a:spcPct val="100000"/>
+                            </a:lnSpc>
+                            <a:spcBef>
+                              <a:spcPts val="0"/>
+                            </a:spcBef>
+                            <a:spcAft>
+                              <a:spcPts val="0"/>
+                            </a:spcAft>
+                            <a:buClrTx/>
+                            <a:buSzTx/>
+                            <a:buFontTx/>
+                            <a:buNone/>
+                            <a:tabLst/>
+                            <a:defRPr/>
+                          </a:pPr>
+                          <a:r>
+                            <a:rPr lang="en-US" dirty="0"/>
+                            <a:t>Trikalinos</a:t>
+                          </a:r>
+                        </a:p>
+                      </a:txBody>
+                      <a:tcPr/>
+                    </a:tc>
+                    <a:extLst>
+                      <a:ext uri="{0D108BD9-81ED-4DB2-BD59-A6C34878D82A}">
+                        <a16:rowId xmlns:a16="http://schemas.microsoft.com/office/drawing/2014/main" val="1442363784"/>
+                      </a:ext>
+                    </a:extLst>
+                  </a:tr>
+                  <a:tr h="370840">
+                    <a:tc>
+                      <a:txBody>
+                        <a:bodyPr/>
+                        <a:lstStyle/>
+                        <a:p>
+                          <a:r>
+                            <a:rPr lang="en-US" dirty="0"/>
+                            <a:t>[15 min]</a:t>
+                          </a:r>
+                        </a:p>
+                      </a:txBody>
+                      <a:tcPr/>
+                    </a:tc>
+                    <a:tc>
+                      <a:txBody>
+                        <a:bodyPr/>
+                        <a:lstStyle/>
+                        <a:p>
+                          <a:pPr marL="0" marR="0" lvl="0" indent="0" algn="l" defTabSz="914400" rtl="0" eaLnBrk="1" fontAlgn="auto" latinLnBrk="0" hangingPunct="1">
+                            <a:lnSpc>
+                              <a:spcPct val="100000"/>
+                            </a:lnSpc>
+                            <a:spcBef>
+                              <a:spcPts val="0"/>
+                            </a:spcBef>
+                            <a:spcAft>
+                              <a:spcPts val="0"/>
+                            </a:spcAft>
+                            <a:buClrTx/>
+                            <a:buSzTx/>
+                            <a:buFontTx/>
+                            <a:buNone/>
+                            <a:tabLst/>
+                            <a:defRPr/>
+                          </a:pPr>
+                          <a:r>
+                            <a:rPr lang="en-US" b="1" dirty="0"/>
+                            <a:t>Break</a:t>
+                          </a:r>
+                        </a:p>
+                      </a:txBody>
+                      <a:tcPr/>
+                    </a:tc>
+                    <a:tc>
+                      <a:txBody>
+                        <a:bodyPr/>
+                        <a:lstStyle/>
+                        <a:p>
+                          <a:endParaRPr lang="en-US" dirty="0"/>
+                        </a:p>
+                      </a:txBody>
+                      <a:tcPr/>
+                    </a:tc>
+                    <a:extLst>
+                      <a:ext uri="{0D108BD9-81ED-4DB2-BD59-A6C34878D82A}">
+                        <a16:rowId xmlns:a16="http://schemas.microsoft.com/office/drawing/2014/main" val="1269228105"/>
+                      </a:ext>
+                    </a:extLst>
+                  </a:tr>
+                  <a:tr h="1188720">
+                    <a:tc>
+                      <a:txBody>
+                        <a:bodyPr/>
+                        <a:lstStyle/>
+                        <a:p>
+                          <a:r>
+                            <a:rPr lang="en-US" dirty="0"/>
+                            <a:t>[80 min]</a:t>
+                          </a:r>
+                        </a:p>
+                      </a:txBody>
+                      <a:tcPr/>
+                    </a:tc>
+                    <a:tc>
+                      <a:txBody>
+                        <a:bodyPr/>
+                        <a:lstStyle/>
+                        <a:p>
+                          <a:endParaRPr lang="en-US"/>
+                        </a:p>
+                      </a:txBody>
+                      <a:tcPr>
+                        <a:blipFill>
+                          <a:blip r:embed="rId2"/>
+                          <a:stretch>
+                            <a:fillRect l="-28875" t="-189362" r="-51168" b="-114894"/>
+                          </a:stretch>
+                        </a:blipFill>
+                      </a:tcPr>
+                    </a:tc>
+                    <a:tc>
+                      <a:txBody>
+                        <a:bodyPr/>
+                        <a:lstStyle/>
+                        <a:p>
+                          <a:r>
+                            <a:rPr lang="en-US" dirty="0"/>
+                            <a:t>[All]</a:t>
+                          </a:r>
+                        </a:p>
+                        <a:p>
+                          <a:r>
+                            <a:rPr lang="en-US" dirty="0"/>
+                            <a:t>Trikalinos</a:t>
+                          </a:r>
+                        </a:p>
+                        <a:p>
+                          <a:r>
+                            <a:rPr lang="en-US" dirty="0"/>
+                            <a:t>Sereda</a:t>
+                          </a:r>
+                        </a:p>
+                        <a:p>
+                          <a:pPr marL="0" marR="0" lvl="0" indent="0" algn="l" defTabSz="914400" rtl="0" eaLnBrk="1" fontAlgn="auto" latinLnBrk="0" hangingPunct="1">
+                            <a:lnSpc>
+                              <a:spcPct val="100000"/>
+                            </a:lnSpc>
+                            <a:spcBef>
+                              <a:spcPts val="0"/>
+                            </a:spcBef>
+                            <a:spcAft>
+                              <a:spcPts val="0"/>
+                            </a:spcAft>
+                            <a:buClrTx/>
+                            <a:buSzTx/>
+                            <a:buFontTx/>
+                            <a:buNone/>
+                            <a:tabLst/>
+                            <a:defRPr/>
+                          </a:pPr>
+                          <a:r>
+                            <a:rPr lang="en-US" dirty="0"/>
+                            <a:t>Sereda</a:t>
+                          </a:r>
+                        </a:p>
+                      </a:txBody>
+                      <a:tcPr/>
+                    </a:tc>
+                    <a:extLst>
+                      <a:ext uri="{0D108BD9-81ED-4DB2-BD59-A6C34878D82A}">
+                        <a16:rowId xmlns:a16="http://schemas.microsoft.com/office/drawing/2014/main" val="1448491104"/>
+                      </a:ext>
+                    </a:extLst>
+                  </a:tr>
+                  <a:tr h="914400">
+                    <a:tc>
+                      <a:txBody>
+                        <a:bodyPr/>
+                        <a:lstStyle/>
+                        <a:p>
+                          <a:r>
+                            <a:rPr lang="en-US" dirty="0"/>
+                            <a:t>[5 min]</a:t>
+                          </a:r>
+                        </a:p>
+                      </a:txBody>
+                      <a:tcPr/>
+                    </a:tc>
+                    <a:tc>
+                      <a:txBody>
+                        <a:bodyPr/>
+                        <a:lstStyle/>
+                        <a:p>
+                          <a:pPr marL="0" marR="0" lvl="0" indent="0" algn="l" defTabSz="914400" rtl="0" eaLnBrk="1" fontAlgn="auto" latinLnBrk="0" hangingPunct="1">
+                            <a:lnSpc>
+                              <a:spcPct val="100000"/>
+                            </a:lnSpc>
+                            <a:spcBef>
+                              <a:spcPts val="0"/>
+                            </a:spcBef>
+                            <a:spcAft>
+                              <a:spcPts val="0"/>
+                            </a:spcAft>
+                            <a:buClrTx/>
+                            <a:buSzTx/>
+                            <a:buFontTx/>
+                            <a:buNone/>
+                            <a:tabLst/>
+                            <a:defRPr/>
+                          </a:pPr>
+                          <a:r>
+                            <a:rPr lang="en-US" sz="1800" kern="1200" dirty="0">
+                              <a:solidFill>
+                                <a:schemeClr val="dk1"/>
+                              </a:solidFill>
+                              <a:effectLst/>
+                              <a:latin typeface="+mn-lt"/>
+                              <a:ea typeface="+mn-ea"/>
+                              <a:cs typeface="+mn-cs"/>
+                            </a:rPr>
+                            <a:t>(5) Advanced Topic Teaser on self-excitatory processes: point processes that are not NHPPPs and when you may need them</a:t>
+                          </a:r>
+                        </a:p>
+                      </a:txBody>
+                      <a:tcPr/>
+                    </a:tc>
+                    <a:tc>
+                      <a:txBody>
+                        <a:bodyPr/>
+                        <a:lstStyle/>
+                        <a:p>
+                          <a:r>
+                            <a:rPr lang="en-US" dirty="0"/>
+                            <a:t>Trikalinos</a:t>
+                          </a:r>
+                        </a:p>
+                      </a:txBody>
+                      <a:tcPr/>
+                    </a:tc>
+                    <a:extLst>
+                      <a:ext uri="{0D108BD9-81ED-4DB2-BD59-A6C34878D82A}">
+                        <a16:rowId xmlns:a16="http://schemas.microsoft.com/office/drawing/2014/main" val="3766472740"/>
+                      </a:ext>
+                    </a:extLst>
+                  </a:tr>
+                  <a:tr h="370840">
+                    <a:tc>
+                      <a:txBody>
+                        <a:bodyPr/>
+                        <a:lstStyle/>
+                        <a:p>
+                          <a:r>
+                            <a:rPr lang="en-US" dirty="0"/>
+                            <a:t>[15 min]</a:t>
+                          </a:r>
+                        </a:p>
+                      </a:txBody>
+                      <a:tcPr/>
+                    </a:tc>
+                    <a:tc>
+                      <a:txBody>
+                        <a:bodyPr/>
+                        <a:lstStyle/>
+                        <a:p>
+                          <a:r>
+                            <a:rPr lang="en-US" dirty="0"/>
+                            <a:t>General Q &amp; A</a:t>
+                          </a:r>
+                        </a:p>
+                      </a:txBody>
+                      <a:tcPr/>
+                    </a:tc>
+                    <a:tc>
+                      <a:txBody>
+                        <a:bodyPr/>
+                        <a:lstStyle/>
+                        <a:p>
+                          <a:r>
+                            <a:rPr lang="en-US" dirty="0"/>
+                            <a:t>All</a:t>
+                          </a:r>
+                        </a:p>
+                      </a:txBody>
+                      <a:tcPr/>
+                    </a:tc>
+                    <a:extLst>
+                      <a:ext uri="{0D108BD9-81ED-4DB2-BD59-A6C34878D82A}">
+                        <a16:rowId xmlns:a16="http://schemas.microsoft.com/office/drawing/2014/main" val="3034331301"/>
+                      </a:ext>
+                    </a:extLst>
+                  </a:tr>
+                </a:tbl>
+              </a:graphicData>
+            </a:graphic>
+          </p:graphicFrame>
+        </mc:Fallback>
+      </mc:AlternateContent>
       <p:sp>
         <p:nvSpPr>
-          <p:cNvPr id="3" name="TextBox 2">
+          <p:cNvPr id="8" name="TextBox 7">
             <a:extLst>
               <a:ext uri="{FF2B5EF4-FFF2-40B4-BE49-F238E27FC236}">
-                <a16:creationId xmlns:a16="http://schemas.microsoft.com/office/drawing/2014/main" id="{0D273D2B-5686-03F0-DF4D-09349A37AFF6}"/>
+                <a16:creationId xmlns:a16="http://schemas.microsoft.com/office/drawing/2014/main" id="{2DCAD759-1FA8-91CF-9E98-477F56A499DF}"/>
               </a:ext>
             </a:extLst>
           </p:cNvPr>
@@ -5494,7 +6923,7 @@
           <a:p>
             <a:r>
               <a:rPr lang="en-US" sz="2400" dirty="0"/>
-              <a:t>Sunday 15</a:t>
+              <a:t>Sunday 28</a:t>
             </a:r>
             <a:r>
               <a:rPr lang="en-US" sz="2400" baseline="30000" dirty="0"/>
@@ -5502,7 +6931,17 @@
             </a:r>
             <a:r>
               <a:rPr lang="en-US" sz="2400" dirty="0"/>
-              <a:t> of June, 9:00 to 12:30</a:t>
+              <a:t> of June, 8:35 to 12:</a:t>
+            </a:r>
+            <a:r>
+              <a:rPr lang="en-US" sz="2400" dirty="0">
+                <a:sym typeface="Wingdings" pitchFamily="2" charset="2"/>
+              </a:rPr>
+              <a:t>0</a:t>
+            </a:r>
+            <a:r>
+              <a:rPr lang="en-US" sz="2400" dirty="0"/>
+              <a:t>0</a:t>
             </a:r>
           </a:p>
         </p:txBody>
